--- a/presentations/mid_term_202606/04_slides_draft/中間発表_スライド_v5.pptx
+++ b/presentations/mid_term_202606/04_slides_draft/中間発表_スライド_v5.pptx
@@ -26,7 +26,7 @@
     <p:sldId id="413" r:id="rId17"/>
   </p:sldIdLst>
   <p:sldSz cx="9906000" cy="6858000" type="A4"/>
-  <p:notesSz cx="6858000" cy="9874250"/>
+  <p:notesSz cx="6792913" cy="9925050"/>
   <p:defaultTextStyle>
     <a:defPPr marR="0" lvl="0" algn="l" rtl="0">
       <a:lnSpc>
@@ -300,7 +300,7 @@
       <p15:notesGuideLst xmlns:p15="http://schemas.microsoft.com/office/powerpoint/2012/main"/>
     </p:ext>
     <p:ext uri="GoogleSlidesCustomDataVersion2">
-      <go:slidesCustomData xmlns:go="http://customooxmlschemas.google.com/" xmlns:ahyp="http://schemas.microsoft.com/office/drawing/2018/hyperlinkcolor" xmlns:p15="http://schemas.microsoft.com/office/powerpoint/2012/main" xmlns:p14="http://schemas.microsoft.com/office/powerpoint/2010/main" xmlns:com="http://schemas.openxmlformats.org/drawingml/2006/compatibility" xmlns:pvml="urn:schemas-microsoft-com:office:powerpoint" xmlns:v="urn:schemas-microsoft-com:vml" xmlns:o="urn:schemas-microsoft-com:office:office" xmlns:dgm="http://schemas.openxmlformats.org/drawingml/2006/diagram" xmlns:c="http://schemas.openxmlformats.org/drawingml/2006/chart" xmlns:mv="urn:schemas-microsoft-com:mac:vml" xmlns:mc="http://schemas.openxmlformats.org/markup-compatibility/2006" xmlns="" r:id="rId51" roundtripDataSignature="AMtx7mhGZ7uZ5vFhmAr7D05oSO2hGt9NUg=="/>
+      <go:slidesCustomData xmlns="" xmlns:mc="http://schemas.openxmlformats.org/markup-compatibility/2006" xmlns:mv="urn:schemas-microsoft-com:mac:vml" xmlns:c="http://schemas.openxmlformats.org/drawingml/2006/chart" xmlns:dgm="http://schemas.openxmlformats.org/drawingml/2006/diagram" xmlns:o="urn:schemas-microsoft-com:office:office" xmlns:v="urn:schemas-microsoft-com:vml" xmlns:pvml="urn:schemas-microsoft-com:office:powerpoint" xmlns:com="http://schemas.openxmlformats.org/drawingml/2006/compatibility" xmlns:p14="http://schemas.microsoft.com/office/powerpoint/2010/main" xmlns:p15="http://schemas.microsoft.com/office/powerpoint/2012/main" xmlns:ahyp="http://schemas.microsoft.com/office/drawing/2018/hyperlinkcolor" xmlns:go="http://customooxmlschemas.google.com/" r:id="rId51" roundtripDataSignature="AMtx7mhGZ7uZ5vFhmAr7D05oSO2hGt9NUg=="/>
     </p:ext>
   </p:extLst>
 </p:presentation>
@@ -572,8 +572,8 @@
         </p:nvSpPr>
         <p:spPr>
           <a:xfrm>
-            <a:off x="0" y="0"/>
-            <a:ext cx="2971800" cy="493713"/>
+            <a:off x="0" y="1"/>
+            <a:ext cx="2943596" cy="496253"/>
           </a:xfrm>
           <a:prstGeom prst="rect">
             <a:avLst/>
@@ -840,8 +840,8 @@
         </p:nvSpPr>
         <p:spPr>
           <a:xfrm>
-            <a:off x="3884613" y="0"/>
-            <a:ext cx="2971800" cy="493713"/>
+            <a:off x="3847745" y="1"/>
+            <a:ext cx="2943596" cy="496253"/>
           </a:xfrm>
           <a:prstGeom prst="rect">
             <a:avLst/>
@@ -1108,8 +1108,8 @@
         </p:nvSpPr>
         <p:spPr>
           <a:xfrm>
-            <a:off x="752475" y="739775"/>
-            <a:ext cx="5351463" cy="3705225"/>
+            <a:off x="708025" y="742950"/>
+            <a:ext cx="5376863" cy="3724275"/>
           </a:xfrm>
           <a:custGeom>
             <a:avLst/>
@@ -1159,8 +1159,8 @@
         </p:nvSpPr>
         <p:spPr>
           <a:xfrm>
-            <a:off x="684213" y="4689475"/>
-            <a:ext cx="5489575" cy="4445000"/>
+            <a:off x="677720" y="4713601"/>
+            <a:ext cx="5437475" cy="4467868"/>
           </a:xfrm>
           <a:prstGeom prst="rect">
             <a:avLst/>
@@ -1427,8 +1427,8 @@
         </p:nvSpPr>
         <p:spPr>
           <a:xfrm>
-            <a:off x="0" y="9378950"/>
-            <a:ext cx="2971800" cy="493713"/>
+            <a:off x="0" y="9427202"/>
+            <a:ext cx="2943596" cy="496253"/>
           </a:xfrm>
           <a:prstGeom prst="rect">
             <a:avLst/>
@@ -1695,8 +1695,8 @@
         </p:nvSpPr>
         <p:spPr>
           <a:xfrm>
-            <a:off x="3884613" y="9378950"/>
-            <a:ext cx="2971800" cy="493713"/>
+            <a:off x="3847745" y="9427202"/>
+            <a:ext cx="2943596" cy="496253"/>
           </a:xfrm>
           <a:prstGeom prst="rect">
             <a:avLst/>
@@ -2017,8 +2017,8 @@
         </p:nvSpPr>
         <p:spPr>
           <a:xfrm>
-            <a:off x="684213" y="4689475"/>
-            <a:ext cx="5489575" cy="4445000"/>
+            <a:off x="677720" y="4713601"/>
+            <a:ext cx="5437475" cy="4467868"/>
           </a:xfrm>
           <a:prstGeom prst="rect">
             <a:avLst/>
@@ -2063,8 +2063,8 @@
         </p:nvSpPr>
         <p:spPr>
           <a:xfrm>
-            <a:off x="752475" y="739775"/>
-            <a:ext cx="5351463" cy="3705225"/>
+            <a:off x="708025" y="742950"/>
+            <a:ext cx="5376863" cy="3724275"/>
           </a:xfrm>
           <a:custGeom>
             <a:avLst/>
@@ -2400,6 +2400,123 @@
                 <a:cs typeface="Arial"/>
                 <a:sym typeface="Arial"/>
               </a:rPr>
+              <a:t>5</a:t>
+            </a:fld>
+            <a:endParaRPr lang="ja-JP" altLang="en-US" sz="1200" b="0" i="0" u="none" strike="noStrike" cap="none" dirty="0">
+              <a:solidFill>
+                <a:schemeClr val="dk1"/>
+              </a:solidFill>
+              <a:latin typeface="Arial"/>
+              <a:ea typeface="Arial"/>
+              <a:cs typeface="Arial"/>
+              <a:sym typeface="Arial"/>
+            </a:endParaRPr>
+          </a:p>
+        </p:txBody>
+      </p:sp>
+    </p:spTree>
+    <p:extLst>
+      <p:ext uri="{BB962C8B-B14F-4D97-AF65-F5344CB8AC3E}">
+        <p14:creationId xmlns:p14="http://schemas.microsoft.com/office/powerpoint/2010/main" val="2009025525"/>
+      </p:ext>
+    </p:extLst>
+  </p:cSld>
+  <p:clrMapOvr>
+    <a:masterClrMapping/>
+  </p:clrMapOvr>
+</p:notes>
+</file>
+
+<file path=ppt/notesSlides/notesSlide4.xml><?xml version="1.0" encoding="utf-8"?>
+<p:notes xmlns:a="http://schemas.openxmlformats.org/drawingml/2006/main" xmlns:r="http://schemas.openxmlformats.org/officeDocument/2006/relationships" xmlns:p="http://schemas.openxmlformats.org/presentationml/2006/main">
+  <p:cSld>
+    <p:spTree>
+      <p:nvGrpSpPr>
+        <p:cNvPr id="1" name=""/>
+        <p:cNvGrpSpPr/>
+        <p:nvPr/>
+      </p:nvGrpSpPr>
+      <p:grpSpPr>
+        <a:xfrm>
+          <a:off x="0" y="0"/>
+          <a:ext cx="0" cy="0"/>
+          <a:chOff x="0" y="0"/>
+          <a:chExt cx="0" cy="0"/>
+        </a:xfrm>
+      </p:grpSpPr>
+      <p:sp>
+        <p:nvSpPr>
+          <p:cNvPr id="2" name="スライド イメージ プレースホルダー 1"/>
+          <p:cNvSpPr>
+            <a:spLocks noGrp="1" noRot="1" noChangeAspect="1"/>
+          </p:cNvSpPr>
+          <p:nvPr>
+            <p:ph type="sldImg"/>
+          </p:nvPr>
+        </p:nvSpPr>
+        <p:spPr/>
+      </p:sp>
+      <p:sp>
+        <p:nvSpPr>
+          <p:cNvPr id="3" name="ノート プレースホルダー 2"/>
+          <p:cNvSpPr>
+            <a:spLocks noGrp="1"/>
+          </p:cNvSpPr>
+          <p:nvPr>
+            <p:ph type="body" idx="1"/>
+          </p:nvPr>
+        </p:nvSpPr>
+        <p:spPr/>
+        <p:txBody>
+          <a:bodyPr/>
+          <a:lstStyle/>
+          <a:p>
+            <a:endParaRPr kumimoji="1" lang="ja-JP" altLang="en-US" dirty="0"/>
+          </a:p>
+        </p:txBody>
+      </p:sp>
+      <p:sp>
+        <p:nvSpPr>
+          <p:cNvPr id="4" name="スライド番号プレースホルダー 3"/>
+          <p:cNvSpPr>
+            <a:spLocks noGrp="1"/>
+          </p:cNvSpPr>
+          <p:nvPr>
+            <p:ph type="sldNum" idx="12"/>
+          </p:nvPr>
+        </p:nvSpPr>
+        <p:spPr/>
+        <p:txBody>
+          <a:bodyPr/>
+          <a:lstStyle/>
+          <a:p>
+            <a:pPr marL="0" marR="0" lvl="0" indent="0" algn="r" rtl="0">
+              <a:lnSpc>
+                <a:spcPct val="100000"/>
+              </a:lnSpc>
+              <a:spcBef>
+                <a:spcPts val="0"/>
+              </a:spcBef>
+              <a:spcAft>
+                <a:spcPts val="0"/>
+              </a:spcAft>
+              <a:buClr>
+                <a:srgbClr val="000000"/>
+              </a:buClr>
+              <a:buSzPts val="1200"/>
+              <a:buFont typeface="Arial"/>
+              <a:buNone/>
+            </a:pPr>
+            <a:fld id="{00000000-1234-1234-1234-123412341234}" type="slidenum">
+              <a:rPr lang="en-US" altLang="ja-JP" sz="1200" b="0" i="0" u="none" strike="noStrike" cap="none" smtClean="0">
+                <a:solidFill>
+                  <a:schemeClr val="dk1"/>
+                </a:solidFill>
+                <a:latin typeface="Arial"/>
+                <a:ea typeface="Arial"/>
+                <a:cs typeface="Arial"/>
+                <a:sym typeface="Arial"/>
+              </a:rPr>
               <a:t>6</a:t>
             </a:fld>
             <a:endParaRPr lang="ja-JP" altLang="en-US" sz="1200" b="0" i="0" u="none" strike="noStrike" cap="none" dirty="0">
@@ -2427,7 +2544,7 @@
 </p:notes>
 </file>
 
-<file path=ppt/notesSlides/notesSlide4.xml><?xml version="1.0" encoding="utf-8"?>
+<file path=ppt/notesSlides/notesSlide5.xml><?xml version="1.0" encoding="utf-8"?>
 <p:notes xmlns:a="http://schemas.openxmlformats.org/drawingml/2006/main" xmlns:r="http://schemas.openxmlformats.org/officeDocument/2006/relationships" xmlns:p="http://schemas.openxmlformats.org/presentationml/2006/main">
   <p:cSld>
     <p:spTree>
@@ -6925,25 +7042,24 @@
         <p:spPr>
           <a:xfrm>
             <a:off x="274320" y="914400"/>
-            <a:ext cx="4983480" cy="1463040"/>
+            <a:ext cx="9473184" cy="828804"/>
           </a:xfrm>
         </p:spPr>
         <p:txBody>
           <a:bodyPr wrap="square"/>
           <a:lstStyle/>
           <a:p>
-            <a:pPr/>
-            <a:r>
-              <a:rPr b="1" sz="1400">
+            <a:r>
+              <a:rPr sz="1600" b="1" dirty="0">
                 <a:solidFill>
                   <a:srgbClr val="1B2A5A"/>
                 </a:solidFill>
                 <a:latin typeface="Arial"/>
                 <a:ea typeface="Arial"/>
               </a:rPr>
-              <a:t>車両追従制御（ACC）の2体の状態方程式を波動系へ写して位相同期を設計する。本研究は電圧 u が周波数差 Δf を静的に決めるため、ACC の二重積分より1段素直な単積分（誤差 e の1状態, G(s)=K/s）の系となる。</a:t>
-            </a:r>
-            <a:endParaRPr dirty="0">
+              <a:t>車両追従制御（ACC）の2体の状態方程式を波動系へ写して位相同期を設計する。</a:t>
+            </a:r>
+            <a:endParaRPr sz="2000" dirty="0">
               <a:latin typeface="Arial"/>
               <a:ea typeface="Arial"/>
             </a:endParaRPr>
@@ -6972,7 +7088,7 @@
         </p:blipFill>
         <p:spPr>
           <a:xfrm>
-            <a:off x="5344669" y="1743204"/>
+            <a:off x="5598669" y="1524146"/>
             <a:ext cx="3626614" cy="2410234"/>
           </a:xfrm>
           <a:prstGeom prst="rect">
@@ -7002,7 +7118,7 @@
         </p:blipFill>
         <p:spPr>
           <a:xfrm>
-            <a:off x="5292090" y="4153438"/>
+            <a:off x="5598669" y="4083110"/>
             <a:ext cx="3633473" cy="2410234"/>
           </a:xfrm>
           <a:prstGeom prst="rect">
@@ -7019,7 +7135,7 @@
         <p:spPr>
           <a:xfrm>
             <a:off x="365760" y="2542032"/>
-            <a:ext cx="4754880" cy="274320"/>
+            <a:ext cx="4754880" cy="194925"/>
           </a:xfrm>
           <a:prstGeom prst="rect">
             <a:avLst/>
@@ -7027,22 +7143,79 @@
           <a:noFill/>
         </p:spPr>
         <p:txBody>
-          <a:bodyPr wrap="square" lIns="25400" rIns="25400" tIns="12700" bIns="12700">
+          <a:bodyPr wrap="square" lIns="25400" tIns="12700" rIns="25400" bIns="12700">
             <a:spAutoFit/>
           </a:bodyPr>
           <a:lstStyle/>
           <a:p>
             <a:pPr algn="l"/>
             <a:r>
-              <a:rPr sz="900" b="1">
+              <a:rPr sz="1100" b="1" dirty="0">
                 <a:solidFill>
                   <a:srgbClr val="1B2A5A"/>
                 </a:solidFill>
                 <a:latin typeface="Arial"/>
                 <a:ea typeface="Arial"/>
               </a:rPr>
-              <a:t>① ACC（2体・二重積分）  e=車間誤差, v=相対速度, a=加速度入力</a:t>
-            </a:r>
+              <a:t>① ACC（2体・二重積分）  e=</a:t>
+            </a:r>
+            <a:r>
+              <a:rPr sz="1100" b="1" dirty="0" err="1">
+                <a:solidFill>
+                  <a:srgbClr val="1B2A5A"/>
+                </a:solidFill>
+                <a:latin typeface="Arial"/>
+                <a:ea typeface="Arial"/>
+              </a:rPr>
+              <a:t>車間誤差</a:t>
+            </a:r>
+            <a:r>
+              <a:rPr sz="1100" b="1" dirty="0">
+                <a:solidFill>
+                  <a:srgbClr val="1B2A5A"/>
+                </a:solidFill>
+                <a:latin typeface="Arial"/>
+                <a:ea typeface="Arial"/>
+              </a:rPr>
+              <a:t>, v=</a:t>
+            </a:r>
+            <a:r>
+              <a:rPr sz="1100" b="1" dirty="0" err="1">
+                <a:solidFill>
+                  <a:srgbClr val="1B2A5A"/>
+                </a:solidFill>
+                <a:latin typeface="Arial"/>
+                <a:ea typeface="Arial"/>
+              </a:rPr>
+              <a:t>相対速度</a:t>
+            </a:r>
+            <a:r>
+              <a:rPr sz="1100" b="1" dirty="0">
+                <a:solidFill>
+                  <a:srgbClr val="1B2A5A"/>
+                </a:solidFill>
+                <a:latin typeface="Arial"/>
+                <a:ea typeface="Arial"/>
+              </a:rPr>
+              <a:t>, a=</a:t>
+            </a:r>
+            <a:r>
+              <a:rPr sz="1100" b="1" dirty="0" err="1">
+                <a:solidFill>
+                  <a:srgbClr val="1B2A5A"/>
+                </a:solidFill>
+                <a:latin typeface="Arial"/>
+                <a:ea typeface="Arial"/>
+              </a:rPr>
+              <a:t>加速度入力</a:t>
+            </a:r>
+            <a:endParaRPr sz="1100" b="1" dirty="0">
+              <a:solidFill>
+                <a:srgbClr val="1B2A5A"/>
+              </a:solidFill>
+              <a:latin typeface="Arial"/>
+              <a:ea typeface="Arial"/>
+            </a:endParaRPr>
           </a:p>
         </p:txBody>
       </p:sp>
@@ -7079,7 +7252,7 @@
         <p:spPr>
           <a:xfrm>
             <a:off x="365760" y="3584448"/>
-            <a:ext cx="4846320" cy="274320"/>
+            <a:ext cx="4846320" cy="194925"/>
           </a:xfrm>
           <a:prstGeom prst="rect">
             <a:avLst/>
@@ -7087,21 +7260,81 @@
           <a:noFill/>
         </p:spPr>
         <p:txBody>
-          <a:bodyPr wrap="square" lIns="25400" rIns="25400" tIns="12700" bIns="12700">
+          <a:bodyPr wrap="square" lIns="25400" tIns="12700" rIns="25400" bIns="12700">
             <a:spAutoFit/>
           </a:bodyPr>
           <a:lstStyle/>
           <a:p>
             <a:pPr algn="l"/>
             <a:r>
-              <a:rPr sz="900" b="1">
+              <a:rPr sz="1100" b="1" dirty="0">
                 <a:solidFill>
                   <a:srgbClr val="1B2A5A"/>
                 </a:solidFill>
                 <a:latin typeface="Arial"/>
                 <a:ea typeface="Arial"/>
               </a:rPr>
-              <a:t>② 波動系（本研究・単積分）  電圧 u が Δf を静的に決定→積分1回で位相 φ</a:t>
+              <a:t>② </a:t>
+            </a:r>
+            <a:r>
+              <a:rPr sz="1100" b="1" dirty="0" err="1">
+                <a:solidFill>
+                  <a:srgbClr val="1B2A5A"/>
+                </a:solidFill>
+                <a:latin typeface="Arial"/>
+                <a:ea typeface="Arial"/>
+              </a:rPr>
+              <a:t>波動系（本研究・単積分</a:t>
+            </a:r>
+            <a:r>
+              <a:rPr sz="1100" b="1" dirty="0">
+                <a:solidFill>
+                  <a:srgbClr val="1B2A5A"/>
+                </a:solidFill>
+                <a:latin typeface="Arial"/>
+                <a:ea typeface="Arial"/>
+              </a:rPr>
+              <a:t>）  </a:t>
+            </a:r>
+            <a:r>
+              <a:rPr sz="1100" b="1" dirty="0" err="1">
+                <a:solidFill>
+                  <a:srgbClr val="1B2A5A"/>
+                </a:solidFill>
+                <a:latin typeface="Arial"/>
+                <a:ea typeface="Arial"/>
+              </a:rPr>
+              <a:t>電圧</a:t>
+            </a:r>
+            <a:r>
+              <a:rPr sz="1100" b="1" dirty="0">
+                <a:solidFill>
+                  <a:srgbClr val="1B2A5A"/>
+                </a:solidFill>
+                <a:latin typeface="Arial"/>
+                <a:ea typeface="Arial"/>
+              </a:rPr>
+              <a:t> u が </a:t>
+            </a:r>
+            <a:r>
+              <a:rPr sz="1100" b="1" dirty="0" err="1">
+                <a:solidFill>
+                  <a:srgbClr val="1B2A5A"/>
+                </a:solidFill>
+                <a:latin typeface="Arial"/>
+                <a:ea typeface="Arial"/>
+              </a:rPr>
+              <a:t>Δf</a:t>
+            </a:r>
+            <a:r>
+              <a:rPr sz="1100" b="1" dirty="0">
+                <a:solidFill>
+                  <a:srgbClr val="1B2A5A"/>
+                </a:solidFill>
+                <a:latin typeface="Arial"/>
+                <a:ea typeface="Arial"/>
+              </a:rPr>
+              <a:t> を静的に決定→積分1回で位相 φ</a:t>
             </a:r>
           </a:p>
         </p:txBody>
@@ -7139,7 +7372,7 @@
         <p:spPr>
           <a:xfrm>
             <a:off x="365760" y="4617720"/>
-            <a:ext cx="4800600" cy="1371600"/>
+            <a:ext cx="4800600" cy="1102866"/>
           </a:xfrm>
           <a:prstGeom prst="rect">
             <a:avLst/>
@@ -7147,22 +7380,381 @@
           <a:noFill/>
         </p:spPr>
         <p:txBody>
-          <a:bodyPr wrap="square" lIns="25400" rIns="25400" tIns="12700" bIns="12700">
+          <a:bodyPr wrap="square" lIns="25400" tIns="12700" rIns="25400" bIns="12700">
             <a:spAutoFit/>
           </a:bodyPr>
           <a:lstStyle/>
           <a:p>
             <a:pPr algn="l"/>
             <a:r>
-              <a:rPr sz="950" b="0">
+              <a:rPr sz="1000" b="0" dirty="0" err="1">
                 <a:solidFill>
                   <a:srgbClr val="202020"/>
                 </a:solidFill>
                 <a:latin typeface="Arial"/>
                 <a:ea typeface="Arial"/>
               </a:rPr>
-              <a:t>対応：制御電圧 u↔加速度入力、周波数差 Δf↔速度、位相差 φ(FRFR)↔位置、目標 φ_ref↔車間目標。Δf は差分 (φ[k]−φ[k−1])/Ts で推定し、e と Δf の両方へフィードバックして φ を目標値で停止＝位相同期。</a:t>
-            </a:r>
+              <a:t>対応</a:t>
+            </a:r>
+            <a:r>
+              <a:rPr sz="1000" b="0" dirty="0">
+                <a:solidFill>
+                  <a:srgbClr val="202020"/>
+                </a:solidFill>
+                <a:latin typeface="Arial"/>
+                <a:ea typeface="Arial"/>
+              </a:rPr>
+              <a:t>：</a:t>
+            </a:r>
+            <a:endParaRPr lang="en-US" sz="1000" b="0" dirty="0">
+              <a:solidFill>
+                <a:srgbClr val="202020"/>
+              </a:solidFill>
+              <a:latin typeface="Arial"/>
+              <a:ea typeface="Arial"/>
+            </a:endParaRPr>
+          </a:p>
+          <a:p>
+            <a:pPr algn="l"/>
+            <a:r>
+              <a:rPr lang="ja-JP" altLang="en-US" sz="1000" b="0" dirty="0">
+                <a:solidFill>
+                  <a:srgbClr val="202020"/>
+                </a:solidFill>
+                <a:latin typeface="Arial"/>
+                <a:ea typeface="Arial"/>
+              </a:rPr>
+              <a:t>・</a:t>
+            </a:r>
+            <a:r>
+              <a:rPr sz="1000" b="0" dirty="0" err="1">
+                <a:solidFill>
+                  <a:srgbClr val="202020"/>
+                </a:solidFill>
+                <a:latin typeface="Arial"/>
+                <a:ea typeface="Arial"/>
+              </a:rPr>
+              <a:t>制御電圧</a:t>
+            </a:r>
+            <a:r>
+              <a:rPr sz="1000" b="0" dirty="0">
+                <a:solidFill>
+                  <a:srgbClr val="202020"/>
+                </a:solidFill>
+                <a:latin typeface="Arial"/>
+                <a:ea typeface="Arial"/>
+              </a:rPr>
+              <a:t> </a:t>
+            </a:r>
+            <a:r>
+              <a:rPr sz="1000" b="0" dirty="0" err="1">
+                <a:solidFill>
+                  <a:srgbClr val="202020"/>
+                </a:solidFill>
+                <a:latin typeface="Arial"/>
+                <a:ea typeface="Arial"/>
+              </a:rPr>
+              <a:t>u↔加速度入力</a:t>
+            </a:r>
+            <a:endParaRPr lang="en-US" sz="1000" b="0" dirty="0">
+              <a:solidFill>
+                <a:srgbClr val="202020"/>
+              </a:solidFill>
+              <a:latin typeface="Arial"/>
+              <a:ea typeface="Arial"/>
+            </a:endParaRPr>
+          </a:p>
+          <a:p>
+            <a:pPr algn="l"/>
+            <a:r>
+              <a:rPr lang="ja-JP" altLang="en-US" sz="1000" dirty="0">
+                <a:solidFill>
+                  <a:srgbClr val="202020"/>
+                </a:solidFill>
+              </a:rPr>
+              <a:t>・</a:t>
+            </a:r>
+            <a:r>
+              <a:rPr sz="1000" b="0" dirty="0" err="1">
+                <a:solidFill>
+                  <a:srgbClr val="202020"/>
+                </a:solidFill>
+                <a:latin typeface="Arial"/>
+                <a:ea typeface="Arial"/>
+              </a:rPr>
+              <a:t>周波数差</a:t>
+            </a:r>
+            <a:r>
+              <a:rPr sz="1000" b="0" dirty="0">
+                <a:solidFill>
+                  <a:srgbClr val="202020"/>
+                </a:solidFill>
+                <a:latin typeface="Arial"/>
+                <a:ea typeface="Arial"/>
+              </a:rPr>
+              <a:t> </a:t>
+            </a:r>
+            <a:r>
+              <a:rPr sz="1000" b="0" dirty="0" err="1">
+                <a:solidFill>
+                  <a:srgbClr val="202020"/>
+                </a:solidFill>
+                <a:latin typeface="Arial"/>
+                <a:ea typeface="Arial"/>
+              </a:rPr>
+              <a:t>Δf↔速度</a:t>
+            </a:r>
+            <a:endParaRPr lang="en-US" sz="1000" b="0" dirty="0">
+              <a:solidFill>
+                <a:srgbClr val="202020"/>
+              </a:solidFill>
+              <a:latin typeface="Arial"/>
+              <a:ea typeface="Arial"/>
+            </a:endParaRPr>
+          </a:p>
+          <a:p>
+            <a:pPr algn="l"/>
+            <a:r>
+              <a:rPr lang="ja-JP" altLang="en-US" sz="1000" dirty="0">
+                <a:solidFill>
+                  <a:srgbClr val="202020"/>
+                </a:solidFill>
+              </a:rPr>
+              <a:t>・</a:t>
+            </a:r>
+            <a:r>
+              <a:rPr sz="1000" b="0" dirty="0" err="1">
+                <a:solidFill>
+                  <a:srgbClr val="202020"/>
+                </a:solidFill>
+                <a:latin typeface="Arial"/>
+                <a:ea typeface="Arial"/>
+              </a:rPr>
+              <a:t>位相差</a:t>
+            </a:r>
+            <a:r>
+              <a:rPr sz="1000" b="0" dirty="0">
+                <a:solidFill>
+                  <a:srgbClr val="202020"/>
+                </a:solidFill>
+                <a:latin typeface="Arial"/>
+                <a:ea typeface="Arial"/>
+              </a:rPr>
+              <a:t> φ(FRFR)↔</a:t>
+            </a:r>
+            <a:r>
+              <a:rPr sz="1000" b="0" dirty="0" err="1">
+                <a:solidFill>
+                  <a:srgbClr val="202020"/>
+                </a:solidFill>
+                <a:latin typeface="Arial"/>
+                <a:ea typeface="Arial"/>
+              </a:rPr>
+              <a:t>位置</a:t>
+            </a:r>
+            <a:r>
+              <a:rPr sz="1000" b="0" dirty="0">
+                <a:solidFill>
+                  <a:srgbClr val="202020"/>
+                </a:solidFill>
+                <a:latin typeface="Arial"/>
+                <a:ea typeface="Arial"/>
+              </a:rPr>
+              <a:t>、</a:t>
+            </a:r>
+            <a:endParaRPr lang="en-US" sz="1000" b="0" dirty="0">
+              <a:solidFill>
+                <a:srgbClr val="202020"/>
+              </a:solidFill>
+              <a:latin typeface="Arial"/>
+              <a:ea typeface="Arial"/>
+            </a:endParaRPr>
+          </a:p>
+          <a:p>
+            <a:pPr algn="l"/>
+            <a:r>
+              <a:rPr lang="ja-JP" altLang="en-US" sz="1000" dirty="0">
+                <a:solidFill>
+                  <a:srgbClr val="202020"/>
+                </a:solidFill>
+              </a:rPr>
+              <a:t>・</a:t>
+            </a:r>
+            <a:r>
+              <a:rPr sz="1000" b="0" dirty="0" err="1">
+                <a:solidFill>
+                  <a:srgbClr val="202020"/>
+                </a:solidFill>
+                <a:latin typeface="Arial"/>
+                <a:ea typeface="Arial"/>
+              </a:rPr>
+              <a:t>目標</a:t>
+            </a:r>
+            <a:r>
+              <a:rPr sz="1000" b="0" dirty="0">
+                <a:solidFill>
+                  <a:srgbClr val="202020"/>
+                </a:solidFill>
+                <a:latin typeface="Arial"/>
+                <a:ea typeface="Arial"/>
+              </a:rPr>
+              <a:t> </a:t>
+            </a:r>
+            <a:r>
+              <a:rPr sz="1000" b="0" dirty="0" err="1">
+                <a:solidFill>
+                  <a:srgbClr val="202020"/>
+                </a:solidFill>
+                <a:latin typeface="Arial"/>
+                <a:ea typeface="Arial"/>
+              </a:rPr>
+              <a:t>φ_ref↔車間目標</a:t>
+            </a:r>
+            <a:r>
+              <a:rPr sz="1000" b="0" dirty="0">
+                <a:solidFill>
+                  <a:srgbClr val="202020"/>
+                </a:solidFill>
+                <a:latin typeface="Arial"/>
+                <a:ea typeface="Arial"/>
+              </a:rPr>
+              <a:t>。</a:t>
+            </a:r>
+            <a:endParaRPr lang="en-US" sz="1000" b="0" dirty="0">
+              <a:solidFill>
+                <a:srgbClr val="202020"/>
+              </a:solidFill>
+              <a:latin typeface="Arial"/>
+              <a:ea typeface="Arial"/>
+            </a:endParaRPr>
+          </a:p>
+          <a:p>
+            <a:pPr algn="l"/>
+            <a:r>
+              <a:rPr lang="ja-JP" altLang="en-US" sz="1000" dirty="0">
+                <a:solidFill>
+                  <a:srgbClr val="202020"/>
+                </a:solidFill>
+              </a:rPr>
+              <a:t>・</a:t>
+            </a:r>
+            <a:r>
+              <a:rPr sz="1000" b="0" dirty="0" err="1">
+                <a:solidFill>
+                  <a:srgbClr val="202020"/>
+                </a:solidFill>
+                <a:latin typeface="Arial"/>
+                <a:ea typeface="Arial"/>
+              </a:rPr>
+              <a:t>Δf</a:t>
+            </a:r>
+            <a:r>
+              <a:rPr sz="1000" b="0" dirty="0">
+                <a:solidFill>
+                  <a:srgbClr val="202020"/>
+                </a:solidFill>
+                <a:latin typeface="Arial"/>
+                <a:ea typeface="Arial"/>
+              </a:rPr>
+              <a:t> </a:t>
+            </a:r>
+            <a:r>
+              <a:rPr sz="1000" b="0" dirty="0" err="1">
+                <a:solidFill>
+                  <a:srgbClr val="202020"/>
+                </a:solidFill>
+                <a:latin typeface="Arial"/>
+                <a:ea typeface="Arial"/>
+              </a:rPr>
+              <a:t>は差分</a:t>
+            </a:r>
+            <a:r>
+              <a:rPr sz="1000" b="0" dirty="0">
+                <a:solidFill>
+                  <a:srgbClr val="202020"/>
+                </a:solidFill>
+                <a:latin typeface="Arial"/>
+                <a:ea typeface="Arial"/>
+              </a:rPr>
+              <a:t> (φ[k]−φ[k−1])/Ts </a:t>
+            </a:r>
+            <a:r>
+              <a:rPr sz="1000" b="0" dirty="0" err="1">
+                <a:solidFill>
+                  <a:srgbClr val="202020"/>
+                </a:solidFill>
+                <a:latin typeface="Arial"/>
+                <a:ea typeface="Arial"/>
+              </a:rPr>
+              <a:t>で推定し、e</a:t>
+            </a:r>
+            <a:r>
+              <a:rPr sz="1000" b="0" dirty="0">
+                <a:solidFill>
+                  <a:srgbClr val="202020"/>
+                </a:solidFill>
+                <a:latin typeface="Arial"/>
+                <a:ea typeface="Arial"/>
+              </a:rPr>
+              <a:t> と </a:t>
+            </a:r>
+            <a:r>
+              <a:rPr sz="1000" b="0" dirty="0" err="1">
+                <a:solidFill>
+                  <a:srgbClr val="202020"/>
+                </a:solidFill>
+                <a:latin typeface="Arial"/>
+                <a:ea typeface="Arial"/>
+              </a:rPr>
+              <a:t>Δf</a:t>
+            </a:r>
+            <a:r>
+              <a:rPr sz="1000" b="0" dirty="0">
+                <a:solidFill>
+                  <a:srgbClr val="202020"/>
+                </a:solidFill>
+                <a:latin typeface="Arial"/>
+                <a:ea typeface="Arial"/>
+              </a:rPr>
+              <a:t> </a:t>
+            </a:r>
+            <a:r>
+              <a:rPr sz="1000" b="0" dirty="0" err="1">
+                <a:solidFill>
+                  <a:srgbClr val="202020"/>
+                </a:solidFill>
+                <a:latin typeface="Arial"/>
+                <a:ea typeface="Arial"/>
+              </a:rPr>
+              <a:t>の両方へフィードバックして</a:t>
+            </a:r>
+            <a:r>
+              <a:rPr sz="1000" b="0" dirty="0">
+                <a:solidFill>
+                  <a:srgbClr val="202020"/>
+                </a:solidFill>
+                <a:latin typeface="Arial"/>
+                <a:ea typeface="Arial"/>
+              </a:rPr>
+              <a:t> φ </a:t>
+            </a:r>
+            <a:r>
+              <a:rPr sz="1000" b="0" dirty="0" err="1">
+                <a:solidFill>
+                  <a:srgbClr val="202020"/>
+                </a:solidFill>
+                <a:latin typeface="Arial"/>
+                <a:ea typeface="Arial"/>
+              </a:rPr>
+              <a:t>を目標値</a:t>
+            </a:r>
+            <a:endParaRPr sz="1000" b="0" dirty="0">
+              <a:solidFill>
+                <a:srgbClr val="202020"/>
+              </a:solidFill>
+              <a:latin typeface="Arial"/>
+              <a:ea typeface="Arial"/>
+            </a:endParaRPr>
           </a:p>
         </p:txBody>
       </p:sp>
@@ -7394,21 +7986,7 @@
                 <a:latin typeface="Arial"/>
                 <a:ea typeface="Arial"/>
               </a:rPr>
-              <a:t>→ </a:t>
-            </a:r>
-            <a:r>
-              <a:rPr dirty="0" err="1">
-                <a:latin typeface="Arial"/>
-                <a:ea typeface="Arial"/>
-              </a:rPr>
-              <a:t>プラントゲイン</a:t>
-            </a:r>
-            <a:r>
-              <a:rPr dirty="0">
-                <a:latin typeface="Arial"/>
-                <a:ea typeface="Arial"/>
-              </a:rPr>
-              <a:t> K≈860 ns/(V·s) </a:t>
+              <a:t>K≈860 ns/(V·s) </a:t>
             </a:r>
             <a:r>
               <a:rPr dirty="0" err="1">
@@ -7433,7 +8011,7 @@
           <p:nvPr/>
         </p:nvPicPr>
         <p:blipFill>
-          <a:blip r:embed="rId3"/>
+          <a:blip r:embed="rId2"/>
           <a:stretch>
             <a:fillRect/>
           </a:stretch>
@@ -7462,7 +8040,7 @@
         </p:nvSpPr>
         <p:spPr>
           <a:xfrm>
-            <a:off x="1997476" y="2432304"/>
+            <a:off x="2027956" y="2183552"/>
             <a:ext cx="6267635" cy="248752"/>
           </a:xfrm>
           <a:prstGeom prst="rect">
@@ -7722,58 +8300,27 @@
         <p:spPr>
           <a:xfrm>
             <a:off x="274320" y="914400"/>
-            <a:ext cx="9326880" cy="2468880"/>
+            <a:ext cx="9326880" cy="969264"/>
           </a:xfrm>
         </p:spPr>
         <p:txBody>
           <a:bodyPr wrap="square"/>
           <a:lstStyle/>
           <a:p>
-            <a:pPr/>
-            <a:r>
-              <a:rPr b="1">
+            <a:r>
+              <a:rPr b="1" dirty="0">
                 <a:solidFill>
                   <a:srgbClr val="1B2A5A"/>
                 </a:solidFill>
                 <a:latin typeface="Arial"/>
                 <a:ea typeface="Arial"/>
               </a:rPr>
-              <a:t>制御ターゲットは2台のOCXO（恒温槽付水晶発振器）の立ち上がりゼロクロス間の時間差 FRFR φ[ns]である。10 MHz では波の周期が100 nsなので、φは0–100 nsで折り返す。φを目標値で一定に保てば2台の位相が揃い、位相同期が成立する。</a:t>
+              <a:t>制御ターゲットは2台のOCXOの立ち上がりゼロクロス間の時間差 FRFR φ[ns]である。10 MHz では波の周期が100 nsなので、φは0–100 nsで折り返す。φを目標値で一定に保てば2台の位相が揃い、位相同期が成立する。</a:t>
             </a:r>
             <a:endParaRPr dirty="0">
               <a:latin typeface="Arial"/>
               <a:ea typeface="Arial"/>
             </a:endParaRPr>
-          </a:p>
-          <a:p>
-            <a:pPr lvl="1"/>
-            <a:r>
-              <a:rPr>
-                <a:latin typeface="Arial"/>
-                <a:ea typeface="Arial"/>
-              </a:rPr>
-              <a:t>FRFR φ[ns]：OCXO-1（基準）とOCXO-2（制御対象）の立ち上がりゼロクロス間の時間差。位相のずれを直接表す量。</a:t>
-            </a:r>
-          </a:p>
-          <a:p>
-            <a:pPr lvl="1"/>
-            <a:r>
-              <a:rPr>
-                <a:latin typeface="Arial"/>
-                <a:ea typeface="Arial"/>
-              </a:rPr>
-              <a:t>10 MHz の周期は100 ns なので φ は0–100 ns で折り返す（ラップ）。折り返しは連続値に戻すアンラップ処理で扱う。</a:t>
-            </a:r>
-          </a:p>
-          <a:p>
-            <a:pPr lvl="1"/>
-            <a:r>
-              <a:rPr>
-                <a:latin typeface="Arial"/>
-                <a:ea typeface="Arial"/>
-              </a:rPr>
-              <a:t>φを目標値 φ_ref に一定保持すること＝2台の位相が揃った状態＝位相同期。</a:t>
-            </a:r>
           </a:p>
         </p:txBody>
       </p:sp>
@@ -7793,8 +8340,8 @@
         </p:blipFill>
         <p:spPr>
           <a:xfrm>
-            <a:off x="1554480" y="3611880"/>
-            <a:ext cx="6949440" cy="3337217"/>
+            <a:off x="228600" y="2240280"/>
+            <a:ext cx="8917778" cy="4282440"/>
           </a:xfrm>
           <a:prstGeom prst="rect">
             <a:avLst/>
@@ -7959,61 +8506,170 @@
         <p:spPr>
           <a:xfrm>
             <a:off x="274320" y="914400"/>
-            <a:ext cx="9326880" cy="1463040"/>
+            <a:ext cx="9326880" cy="1170432"/>
           </a:xfrm>
         </p:spPr>
         <p:txBody>
           <a:bodyPr wrap="square"/>
           <a:lstStyle/>
           <a:p>
-            <a:pPr/>
-            <a:r>
-              <a:rPr b="1">
+            <a:r>
+              <a:rPr b="1" dirty="0" err="1">
                 <a:solidFill>
                   <a:srgbClr val="1B2A5A"/>
                 </a:solidFill>
                 <a:latin typeface="Arial"/>
                 <a:ea typeface="Arial"/>
               </a:rPr>
-              <a:t>位相誤差 e と周波数差 Δf を使う2状態フィードバックで、必要な分だけ電圧を最小刻み単位で動かす。1 LSB 未満は据え置く不感帯により、同期動作そのものが位相雑音を持ち込まない。</a:t>
-            </a:r>
-          </a:p>
-          <a:p>
-            <a:pPr lvl="1"/>
-            <a:r>
-              <a:rPr>
-                <a:latin typeface="Arial"/>
-                <a:ea typeface="Arial"/>
-              </a:rPr>
-              <a:t>出自：ACC（車両追従制御）の状態方程式を波動系へ写した2状態フィードバック。</a:t>
-            </a:r>
+              <a:t>位相誤差</a:t>
+            </a:r>
+            <a:r>
+              <a:rPr b="1" dirty="0">
+                <a:solidFill>
+                  <a:srgbClr val="1B2A5A"/>
+                </a:solidFill>
+                <a:latin typeface="Arial"/>
+                <a:ea typeface="Arial"/>
+              </a:rPr>
+              <a:t> e </a:t>
+            </a:r>
+            <a:r>
+              <a:rPr b="1" dirty="0" err="1">
+                <a:solidFill>
+                  <a:srgbClr val="1B2A5A"/>
+                </a:solidFill>
+                <a:latin typeface="Arial"/>
+                <a:ea typeface="Arial"/>
+              </a:rPr>
+              <a:t>と周波数差</a:t>
+            </a:r>
+            <a:r>
+              <a:rPr b="1" dirty="0">
+                <a:solidFill>
+                  <a:srgbClr val="1B2A5A"/>
+                </a:solidFill>
+                <a:latin typeface="Arial"/>
+                <a:ea typeface="Arial"/>
+              </a:rPr>
+              <a:t> </a:t>
+            </a:r>
+            <a:r>
+              <a:rPr b="1" dirty="0" err="1">
+                <a:solidFill>
+                  <a:srgbClr val="1B2A5A"/>
+                </a:solidFill>
+                <a:latin typeface="Arial"/>
+                <a:ea typeface="Arial"/>
+              </a:rPr>
+              <a:t>Δf</a:t>
+            </a:r>
+            <a:r>
+              <a:rPr b="1" dirty="0">
+                <a:solidFill>
+                  <a:srgbClr val="1B2A5A"/>
+                </a:solidFill>
+                <a:latin typeface="Arial"/>
+                <a:ea typeface="Arial"/>
+              </a:rPr>
+              <a:t> を使う2状態フィードバックで、必要な分だけ電圧を最小刻み単位で動かす。1 LSB </a:t>
+            </a:r>
+            <a:r>
+              <a:rPr b="1" dirty="0" err="1">
+                <a:solidFill>
+                  <a:srgbClr val="1B2A5A"/>
+                </a:solidFill>
+                <a:latin typeface="Arial"/>
+                <a:ea typeface="Arial"/>
+              </a:rPr>
+              <a:t>未満</a:t>
+            </a:r>
+            <a:r>
+              <a:rPr lang="ja-JP" altLang="en-US" b="1" dirty="0">
+                <a:solidFill>
+                  <a:srgbClr val="1B2A5A"/>
+                </a:solidFill>
+              </a:rPr>
+              <a:t>の</a:t>
+            </a:r>
+            <a:r>
+              <a:rPr lang="el-GR" altLang="ja-JP" b="1" dirty="0">
+                <a:solidFill>
+                  <a:srgbClr val="1B2A5A"/>
+                </a:solidFill>
+              </a:rPr>
+              <a:t>Δ</a:t>
+            </a:r>
+            <a:r>
+              <a:rPr lang="en-US" altLang="ja-JP" b="1" dirty="0">
+                <a:solidFill>
+                  <a:srgbClr val="1B2A5A"/>
+                </a:solidFill>
+              </a:rPr>
+              <a:t>f</a:t>
+            </a:r>
+            <a:r>
+              <a:rPr lang="ja-JP" altLang="en-US" b="1" dirty="0">
+                <a:solidFill>
+                  <a:srgbClr val="1B2A5A"/>
+                </a:solidFill>
+              </a:rPr>
+              <a:t>変化はフィードバックを行わない仕様にすることで、</a:t>
+            </a:r>
+            <a:r>
+              <a:rPr b="1" dirty="0" err="1">
+                <a:solidFill>
+                  <a:srgbClr val="1B2A5A"/>
+                </a:solidFill>
+                <a:latin typeface="Arial"/>
+                <a:ea typeface="Arial"/>
+              </a:rPr>
+              <a:t>同期動作そのもの</a:t>
+            </a:r>
+            <a:r>
+              <a:rPr lang="ja-JP" altLang="en-US" b="1" dirty="0">
+                <a:solidFill>
+                  <a:srgbClr val="1B2A5A"/>
+                </a:solidFill>
+                <a:latin typeface="Arial"/>
+                <a:ea typeface="Arial"/>
+              </a:rPr>
+              <a:t>による</a:t>
+            </a:r>
+            <a:r>
+              <a:rPr b="1" dirty="0" err="1">
+                <a:solidFill>
+                  <a:srgbClr val="1B2A5A"/>
+                </a:solidFill>
+                <a:latin typeface="Arial"/>
+                <a:ea typeface="Arial"/>
+              </a:rPr>
+              <a:t>位相雑音</a:t>
+            </a:r>
+            <a:r>
+              <a:rPr lang="ja-JP" altLang="en-US" b="1" dirty="0">
+                <a:solidFill>
+                  <a:srgbClr val="1B2A5A"/>
+                </a:solidFill>
+              </a:rPr>
+              <a:t>への</a:t>
+            </a:r>
+            <a:r>
+              <a:rPr lang="ja-JP" altLang="en-US" b="1" dirty="0">
+                <a:solidFill>
+                  <a:srgbClr val="1B2A5A"/>
+                </a:solidFill>
+                <a:latin typeface="Arial"/>
+                <a:ea typeface="Arial"/>
+              </a:rPr>
+              <a:t>影響を最小限に抑えた。</a:t>
+            </a:r>
+            <a:endParaRPr dirty="0">
+              <a:latin typeface="Arial"/>
+              <a:ea typeface="Arial"/>
+            </a:endParaRPr>
           </a:p>
         </p:txBody>
       </p:sp>
-      <p:pic>
-        <p:nvPicPr>
-          <p:cNvPr id="4" name="Picture 3" descr="image.png"/>
-          <p:cNvPicPr>
-            <a:picLocks noChangeAspect="1"/>
-          </p:cNvPicPr>
-          <p:nvPr/>
-        </p:nvPicPr>
-        <p:blipFill>
-          <a:blip r:embed="rId5"/>
-          <a:stretch>
-            <a:fillRect/>
-          </a:stretch>
-        </p:blipFill>
-        <p:spPr>
-          <a:xfrm>
-            <a:off x="5532120" y="4526280"/>
-            <a:ext cx="4023360" cy="1402218"/>
-          </a:xfrm>
-          <a:prstGeom prst="rect">
-            <a:avLst/>
-          </a:prstGeom>
-        </p:spPr>
-      </p:pic>
       <p:pic>
         <p:nvPicPr>
           <p:cNvPr id="5" name="Picture 4" descr="image.png"/>
@@ -8023,14 +8679,14 @@
           <p:nvPr/>
         </p:nvPicPr>
         <p:blipFill>
-          <a:blip r:embed="rId4"/>
+          <a:blip r:embed="rId2"/>
           <a:stretch>
             <a:fillRect/>
           </a:stretch>
         </p:blipFill>
         <p:spPr>
           <a:xfrm>
-            <a:off x="5532120" y="2148840"/>
+            <a:off x="5806440" y="3296917"/>
             <a:ext cx="4023360" cy="2132808"/>
           </a:xfrm>
           <a:prstGeom prst="rect">
@@ -8046,7 +8702,7 @@
         </p:nvSpPr>
         <p:spPr>
           <a:xfrm>
-            <a:off x="292608" y="2414016"/>
+            <a:off x="274320" y="2647034"/>
             <a:ext cx="1051560" cy="274320"/>
           </a:xfrm>
           <a:prstGeom prst="rect">
@@ -8055,22 +8711,39 @@
           <a:noFill/>
         </p:spPr>
         <p:txBody>
-          <a:bodyPr wrap="square" lIns="25400" rIns="25400" tIns="12700" bIns="12700">
+          <a:bodyPr wrap="square" lIns="25400" tIns="12700" rIns="25400" bIns="12700">
             <a:spAutoFit/>
           </a:bodyPr>
           <a:lstStyle/>
           <a:p>
             <a:pPr algn="l"/>
             <a:r>
-              <a:rPr sz="950" b="1">
+              <a:rPr sz="950" b="1" dirty="0">
                 <a:solidFill>
                   <a:srgbClr val="1B2A5A"/>
                 </a:solidFill>
                 <a:latin typeface="Arial"/>
                 <a:ea typeface="Arial"/>
               </a:rPr>
-              <a:t>①観測</a:t>
-            </a:r>
+              <a:t>①</a:t>
+            </a:r>
+            <a:r>
+              <a:rPr sz="950" b="1" dirty="0" err="1">
+                <a:solidFill>
+                  <a:srgbClr val="1B2A5A"/>
+                </a:solidFill>
+                <a:latin typeface="Arial"/>
+                <a:ea typeface="Arial"/>
+              </a:rPr>
+              <a:t>観測</a:t>
+            </a:r>
+            <a:endParaRPr sz="950" b="1" dirty="0">
+              <a:solidFill>
+                <a:srgbClr val="1B2A5A"/>
+              </a:solidFill>
+              <a:latin typeface="Arial"/>
+              <a:ea typeface="Arial"/>
+            </a:endParaRPr>
           </a:p>
         </p:txBody>
       </p:sp>
@@ -8083,7 +8756,7 @@
           <p:nvPr/>
         </p:nvPicPr>
         <p:blipFill>
-          <a:blip r:embed="rId6"/>
+          <a:blip r:embed="rId3"/>
           <a:stretch>
             <a:fillRect/>
           </a:stretch>
@@ -8115,7 +8788,7 @@
           <a:noFill/>
         </p:spPr>
         <p:txBody>
-          <a:bodyPr wrap="square" lIns="25400" rIns="25400" tIns="12700" bIns="12700">
+          <a:bodyPr wrap="square" lIns="25400" tIns="12700" rIns="25400" bIns="12700">
             <a:spAutoFit/>
           </a:bodyPr>
           <a:lstStyle/>
@@ -8143,7 +8816,7 @@
           <p:nvPr/>
         </p:nvPicPr>
         <p:blipFill>
-          <a:blip r:embed="rId7"/>
+          <a:blip r:embed="rId4"/>
           <a:stretch>
             <a:fillRect/>
           </a:stretch>
@@ -8175,7 +8848,7 @@
           <a:noFill/>
         </p:spPr>
         <p:txBody>
-          <a:bodyPr wrap="square" lIns="25400" rIns="25400" tIns="12700" bIns="12700">
+          <a:bodyPr wrap="square" lIns="25400" tIns="12700" rIns="25400" bIns="12700">
             <a:spAutoFit/>
           </a:bodyPr>
           <a:lstStyle/>
@@ -8203,7 +8876,7 @@
           <p:nvPr/>
         </p:nvPicPr>
         <p:blipFill>
-          <a:blip r:embed="rId8"/>
+          <a:blip r:embed="rId5"/>
           <a:stretch>
             <a:fillRect/>
           </a:stretch>
@@ -8227,7 +8900,7 @@
         <p:spPr>
           <a:xfrm>
             <a:off x="292608" y="4582777"/>
-            <a:ext cx="1051560" cy="274320"/>
+            <a:ext cx="1051560" cy="171842"/>
           </a:xfrm>
           <a:prstGeom prst="rect">
             <a:avLst/>
@@ -8235,22 +8908,39 @@
           <a:noFill/>
         </p:spPr>
         <p:txBody>
-          <a:bodyPr wrap="square" lIns="25400" rIns="25400" tIns="12700" bIns="12700">
+          <a:bodyPr wrap="square" lIns="25400" tIns="12700" rIns="25400" bIns="12700">
             <a:spAutoFit/>
           </a:bodyPr>
           <a:lstStyle/>
           <a:p>
             <a:pPr algn="l"/>
             <a:r>
-              <a:rPr sz="950" b="1">
+              <a:rPr sz="950" b="1" dirty="0">
                 <a:solidFill>
                   <a:srgbClr val="1B2A5A"/>
                 </a:solidFill>
                 <a:latin typeface="Arial"/>
                 <a:ea typeface="Arial"/>
               </a:rPr>
-              <a:t>④逆算(不感帯)</a:t>
-            </a:r>
+              <a:t>④</a:t>
+            </a:r>
+            <a:r>
+              <a:rPr sz="950" b="1" dirty="0" err="1">
+                <a:solidFill>
+                  <a:srgbClr val="1B2A5A"/>
+                </a:solidFill>
+                <a:latin typeface="Arial"/>
+                <a:ea typeface="Arial"/>
+              </a:rPr>
+              <a:t>逆算</a:t>
+            </a:r>
+            <a:endParaRPr sz="950" b="1" dirty="0">
+              <a:solidFill>
+                <a:srgbClr val="1B2A5A"/>
+              </a:solidFill>
+              <a:latin typeface="Arial"/>
+              <a:ea typeface="Arial"/>
+            </a:endParaRPr>
           </a:p>
         </p:txBody>
       </p:sp>
@@ -8263,7 +8953,7 @@
           <p:nvPr/>
         </p:nvPicPr>
         <p:blipFill>
-          <a:blip r:embed="rId9"/>
+          <a:blip r:embed="rId6"/>
           <a:stretch>
             <a:fillRect/>
           </a:stretch>
@@ -8295,7 +8985,7 @@
           <a:noFill/>
         </p:spPr>
         <p:txBody>
-          <a:bodyPr wrap="square" lIns="25400" rIns="25400" tIns="12700" bIns="12700">
+          <a:bodyPr wrap="square" lIns="25400" tIns="12700" rIns="25400" bIns="12700">
             <a:spAutoFit/>
           </a:bodyPr>
           <a:lstStyle/>
@@ -8323,7 +9013,7 @@
           <p:nvPr/>
         </p:nvPicPr>
         <p:blipFill>
-          <a:blip r:embed="rId10"/>
+          <a:blip r:embed="rId7"/>
           <a:stretch>
             <a:fillRect/>
           </a:stretch>
@@ -8425,86 +9115,196 @@
           <a:lstStyle/>
           <a:p>
             <a:r>
-              <a:rPr b="1">
+              <a:rPr lang="ja-JP" altLang="en-US" b="1" dirty="0">
                 <a:solidFill>
                   <a:srgbClr val="1B2A5A"/>
                 </a:solidFill>
                 <a:latin typeface="Arial"/>
                 <a:ea typeface="Arial"/>
               </a:rPr>
-              <a:t>実測モデルに基づくモデルFB（Kp_e=0.08）は、無制御HOLDと同等の低オフセット周波数（0.1–1 Hz）の位相雑音のまま同期できる（差≈0 dB）＝同期時に余分な位相雑音を加えない。比例・微分（PD）制御は短期雑音を生む（対比）。</a:t>
-            </a:r>
-          </a:p>
-          <a:p>
-            <a:pPr lvl="1"/>
-            <a:r>
-              <a:rPr>
-                <a:latin typeface="Arial"/>
-                <a:ea typeface="Arial"/>
-              </a:rPr>
-              <a:t>モデルFB と HOLD の低オフセット周波数（0.1–1 Hz）の位相雑音がほぼ一致（差≈0 dB）</a:t>
-            </a:r>
-          </a:p>
-          <a:p>
-            <a:pPr lvl="1"/>
-            <a:r>
-              <a:rPr>
-                <a:latin typeface="Arial"/>
-                <a:ea typeface="Arial"/>
-              </a:rPr>
-              <a:t>比例・微分（PD）制御は過剰動作で短期ジッタを注入</a:t>
-            </a:r>
+              <a:t>制御モデル</a:t>
+            </a:r>
+            <a:r>
+              <a:rPr b="1" dirty="0">
+                <a:solidFill>
+                  <a:srgbClr val="1B2A5A"/>
+                </a:solidFill>
+                <a:latin typeface="Arial"/>
+                <a:ea typeface="Arial"/>
+              </a:rPr>
+              <a:t>は、</a:t>
+            </a:r>
+            <a:r>
+              <a:rPr lang="en-US" altLang="ja-JP" b="1" dirty="0">
+                <a:solidFill>
+                  <a:srgbClr val="1B2A5A"/>
+                </a:solidFill>
+              </a:rPr>
+              <a:t>2</a:t>
+            </a:r>
+            <a:r>
+              <a:rPr lang="ja-JP" altLang="en-US" b="1" dirty="0">
+                <a:solidFill>
+                  <a:srgbClr val="1B2A5A"/>
+                </a:solidFill>
+              </a:rPr>
+              <a:t>つの</a:t>
+            </a:r>
+            <a:r>
+              <a:rPr lang="en-US" altLang="ja-JP" b="1" dirty="0">
+                <a:solidFill>
+                  <a:srgbClr val="1B2A5A"/>
+                </a:solidFill>
+              </a:rPr>
+              <a:t>OCXO</a:t>
+            </a:r>
+            <a:r>
+              <a:rPr lang="ja-JP" altLang="en-US" b="1" dirty="0">
+                <a:solidFill>
+                  <a:srgbClr val="1B2A5A"/>
+                </a:solidFill>
+              </a:rPr>
+              <a:t>の周波数をそろえた上で</a:t>
+            </a:r>
+            <a:r>
+              <a:rPr b="1" dirty="0" err="1">
+                <a:solidFill>
+                  <a:srgbClr val="1B2A5A"/>
+                </a:solidFill>
+                <a:latin typeface="Arial"/>
+                <a:ea typeface="Arial"/>
+              </a:rPr>
+              <a:t>無制御</a:t>
+            </a:r>
+            <a:r>
+              <a:rPr lang="ja-JP" altLang="en-US" b="1" dirty="0">
+                <a:solidFill>
+                  <a:srgbClr val="1B2A5A"/>
+                </a:solidFill>
+                <a:latin typeface="Arial"/>
+                <a:ea typeface="Arial"/>
+              </a:rPr>
+              <a:t>のモデル</a:t>
+            </a:r>
+            <a:r>
+              <a:rPr b="1" dirty="0">
+                <a:solidFill>
+                  <a:srgbClr val="1B2A5A"/>
+                </a:solidFill>
+                <a:latin typeface="Arial"/>
+                <a:ea typeface="Arial"/>
+              </a:rPr>
+              <a:t>と同等の低オフセット周波数（0.1–1 </a:t>
+            </a:r>
+            <a:r>
+              <a:rPr b="1" dirty="0" err="1">
+                <a:solidFill>
+                  <a:srgbClr val="1B2A5A"/>
+                </a:solidFill>
+                <a:latin typeface="Arial"/>
+                <a:ea typeface="Arial"/>
+              </a:rPr>
+              <a:t>Hz）の位相雑音のまま同期</a:t>
+            </a:r>
+            <a:r>
+              <a:rPr lang="ja-JP" altLang="en-US" b="1" dirty="0">
+                <a:solidFill>
+                  <a:srgbClr val="1B2A5A"/>
+                </a:solidFill>
+                <a:latin typeface="Arial"/>
+                <a:ea typeface="Arial"/>
+              </a:rPr>
+              <a:t>を実現した。</a:t>
+            </a:r>
+            <a:endParaRPr dirty="0">
+              <a:latin typeface="Arial"/>
+              <a:ea typeface="Arial"/>
+            </a:endParaRPr>
           </a:p>
         </p:txBody>
       </p:sp>
       <p:pic>
         <p:nvPicPr>
-          <p:cNvPr id="4" name="Picture 3" descr="image.png"/>
+          <p:cNvPr id="9" name="図 8" descr="The image displays a comparison graph between a modeled frequency response and an uncontrolled, phase-locked signal at 10 MHz, with frequency levels plotted in dB/Hz and various offset frequencies marked.&#10;&#10;AI 生成コンテンツは誤りを含む可能性があります。">
+            <a:extLst>
+              <a:ext uri="{FF2B5EF4-FFF2-40B4-BE49-F238E27FC236}">
+                <a16:creationId xmlns:a16="http://schemas.microsoft.com/office/drawing/2014/main" id="{CDFC6D88-2A72-268B-3D9C-8205C5C25A19}"/>
+              </a:ext>
+            </a:extLst>
+          </p:cNvPr>
           <p:cNvPicPr>
             <a:picLocks noChangeAspect="1"/>
           </p:cNvPicPr>
           <p:nvPr/>
         </p:nvPicPr>
         <p:blipFill>
-          <a:blip r:embed="rId4"/>
+          <a:blip r:embed="rId2"/>
           <a:stretch>
             <a:fillRect/>
           </a:stretch>
         </p:blipFill>
         <p:spPr>
           <a:xfrm>
-            <a:off x="457200" y="2968507"/>
-            <a:ext cx="4449927" cy="3097257"/>
+            <a:off x="304800" y="2002711"/>
+            <a:ext cx="9411446" cy="4224179"/>
           </a:xfrm>
           <a:prstGeom prst="rect">
             <a:avLst/>
           </a:prstGeom>
         </p:spPr>
       </p:pic>
-      <p:pic>
-        <p:nvPicPr>
-          <p:cNvPr id="5" name="Picture 4" descr="image.png"/>
-          <p:cNvPicPr>
-            <a:picLocks noChangeAspect="1"/>
-          </p:cNvPicPr>
+      <p:sp>
+        <p:nvSpPr>
+          <p:cNvPr id="10" name="楕円 9">
+            <a:extLst>
+              <a:ext uri="{FF2B5EF4-FFF2-40B4-BE49-F238E27FC236}">
+                <a16:creationId xmlns:a16="http://schemas.microsoft.com/office/drawing/2014/main" id="{4D21445E-CD6E-92AE-7FCB-1991BE42C25E}"/>
+              </a:ext>
+            </a:extLst>
+          </p:cNvPr>
+          <p:cNvSpPr/>
           <p:nvPr/>
-        </p:nvPicPr>
-        <p:blipFill>
-          <a:blip r:embed="rId5"/>
-          <a:stretch>
-            <a:fillRect/>
-          </a:stretch>
-        </p:blipFill>
+        </p:nvSpPr>
         <p:spPr>
           <a:xfrm>
-            <a:off x="4998567" y="2968507"/>
-            <a:ext cx="4449927" cy="3097257"/>
+            <a:off x="1666240" y="2631440"/>
+            <a:ext cx="1899920" cy="1026160"/>
           </a:xfrm>
-          <a:prstGeom prst="rect">
+          <a:prstGeom prst="ellipse">
             <a:avLst/>
           </a:prstGeom>
+          <a:noFill/>
+          <a:ln>
+            <a:solidFill>
+              <a:schemeClr val="accent2"/>
+            </a:solidFill>
+          </a:ln>
         </p:spPr>
-      </p:pic>
+        <p:style>
+          <a:lnRef idx="2">
+            <a:schemeClr val="accent1">
+              <a:shade val="15000"/>
+            </a:schemeClr>
+          </a:lnRef>
+          <a:fillRef idx="1">
+            <a:schemeClr val="accent1"/>
+          </a:fillRef>
+          <a:effectRef idx="0">
+            <a:schemeClr val="accent1"/>
+          </a:effectRef>
+          <a:fontRef idx="minor">
+            <a:schemeClr val="lt1"/>
+          </a:fontRef>
+        </p:style>
+        <p:txBody>
+          <a:bodyPr rtlCol="0" anchor="ctr"/>
+          <a:lstStyle/>
+          <a:p>
+            <a:pPr algn="ctr"/>
+            <a:endParaRPr kumimoji="1" lang="ja-JP" altLang="en-US"/>
+          </a:p>
+        </p:txBody>
+      </p:sp>
     </p:spTree>
   </p:cSld>
   <p:clrMapOvr>
@@ -8599,7 +9399,54 @@
                 <a:latin typeface="Arial"/>
                 <a:ea typeface="Arial"/>
               </a:rPr>
-              <a:t>フィードバック制御により、余分な位相雑音を加えずに同期させることに成功した（低オフセット周波数（0.1–1 Hz）の位相雑音を悪化させない）。今後は2台を同時制御・合成器で平均して −3 dB を実証し、N台へ拡張する。</a:t>
+              <a:t>フィードバック制御により、余分な位相雑音を加えずに同期させることに成功した（低オフセット周波数（0.1–1 </a:t>
+            </a:r>
+            <a:r>
+              <a:rPr b="1" dirty="0" err="1">
+                <a:solidFill>
+                  <a:srgbClr val="1B2A5A"/>
+                </a:solidFill>
+                <a:latin typeface="Arial"/>
+                <a:ea typeface="Arial"/>
+              </a:rPr>
+              <a:t>Hz）の位相雑音</a:t>
+            </a:r>
+            <a:r>
+              <a:rPr lang="ja-JP" altLang="en-US" b="1" dirty="0">
+                <a:solidFill>
+                  <a:srgbClr val="1B2A5A"/>
+                </a:solidFill>
+              </a:rPr>
+              <a:t>に影響を与えない</a:t>
+            </a:r>
+            <a:r>
+              <a:rPr b="1" dirty="0">
+                <a:solidFill>
+                  <a:srgbClr val="1B2A5A"/>
+                </a:solidFill>
+                <a:latin typeface="Arial"/>
+                <a:ea typeface="Arial"/>
+              </a:rPr>
+              <a:t>）。</a:t>
+            </a:r>
+            <a:endParaRPr lang="en-US" b="1" dirty="0">
+              <a:solidFill>
+                <a:srgbClr val="1B2A5A"/>
+              </a:solidFill>
+              <a:latin typeface="Arial"/>
+              <a:ea typeface="Arial"/>
+            </a:endParaRPr>
+          </a:p>
+          <a:p>
+            <a:r>
+              <a:rPr b="1" dirty="0">
+                <a:solidFill>
+                  <a:srgbClr val="1B2A5A"/>
+                </a:solidFill>
+                <a:latin typeface="Arial"/>
+                <a:ea typeface="Arial"/>
+              </a:rPr>
+              <a:t>今後は2台を同時制御・合成器で平均して −3 dB を実証し、N台へ拡張する。</a:t>
             </a:r>
           </a:p>
         </p:txBody>
@@ -8686,7 +9533,7 @@
           <a:p>
             <a:pPr lvl="1"/>
             <a:r>
-              <a:rPr lang="ja-JP" altLang="en-US" dirty="0">
+              <a:rPr lang="ja-JP" altLang="en-US" b="1" dirty="0">
                 <a:latin typeface="Arial"/>
                 <a:ea typeface="Arial"/>
               </a:rPr>
@@ -8887,21 +9734,21 @@
           <a:p>
             <a:pPr lvl="1"/>
             <a:r>
-              <a:rPr lang="ja-JP" altLang="en-US" dirty="0">
+              <a:rPr lang="ja-JP" altLang="en-US" b="1" dirty="0">
                 <a:latin typeface="Arial"/>
                 <a:ea typeface="Arial"/>
               </a:rPr>
               <a:t>二つの</a:t>
             </a:r>
             <a:r>
-              <a:rPr lang="en-US" altLang="ja-JP" dirty="0">
+              <a:rPr lang="en-US" altLang="ja-JP" b="1" dirty="0">
                 <a:latin typeface="Arial"/>
                 <a:ea typeface="Arial"/>
               </a:rPr>
               <a:t>OCXO</a:t>
             </a:r>
             <a:r>
-              <a:rPr lang="ja-JP" altLang="en-US" dirty="0">
+              <a:rPr lang="ja-JP" altLang="en-US" b="1" dirty="0">
                 <a:latin typeface="Arial"/>
                 <a:ea typeface="Arial"/>
               </a:rPr>
@@ -8940,37 +9787,26 @@
           <a:p>
             <a:pPr lvl="1"/>
             <a:r>
-              <a:rPr lang="ja-JP" altLang="en-US" dirty="0">
+              <a:rPr lang="ja-JP" altLang="en-US" b="1" dirty="0">
                 <a:latin typeface="Arial"/>
                 <a:ea typeface="Arial"/>
               </a:rPr>
               <a:t>同期した</a:t>
             </a:r>
             <a:r>
-              <a:rPr lang="en-US" altLang="ja-JP" dirty="0">
+              <a:rPr lang="en-US" altLang="ja-JP" b="1" dirty="0">
                 <a:latin typeface="Arial"/>
                 <a:ea typeface="Arial"/>
               </a:rPr>
               <a:t>OCXO</a:t>
             </a:r>
             <a:r>
-              <a:rPr lang="ja-JP" altLang="en-US" dirty="0">
-                <a:latin typeface="Arial"/>
-                <a:ea typeface="Arial"/>
-              </a:rPr>
-              <a:t>を合成器で平均し</a:t>
-            </a:r>
-            <a:r>
-              <a:rPr lang="ja-JP" altLang="en-US" dirty="0">
-                <a:latin typeface="Arial"/>
-                <a:ea typeface="Arial"/>
-              </a:rPr>
-              <a:t>測定</a:t>
-            </a:r>
-            <a:endParaRPr lang="ja-JP" altLang="en-US" dirty="0">
-              <a:latin typeface="Arial"/>
-              <a:ea typeface="Arial"/>
-            </a:endParaRPr>
+              <a:rPr lang="ja-JP" altLang="en-US" b="1" dirty="0">
+                <a:latin typeface="Arial"/>
+                <a:ea typeface="Arial"/>
+              </a:rPr>
+              <a:t>を合成器で平均し測定</a:t>
+            </a:r>
           </a:p>
         </p:txBody>
       </p:sp>
@@ -9004,18 +9840,18 @@
           <a:p>
             <a:pPr lvl="1"/>
             <a:r>
-              <a:rPr lang="en-US" altLang="ja-JP" dirty="0">
+              <a:rPr lang="en-US" altLang="ja-JP" b="1" dirty="0">
                 <a:latin typeface="Arial"/>
                 <a:ea typeface="Arial"/>
               </a:rPr>
               <a:t>N</a:t>
             </a:r>
             <a:r>
-              <a:rPr lang="ja-JP" altLang="en-US" dirty="0">
-                <a:latin typeface="Arial"/>
-                <a:ea typeface="Arial"/>
-              </a:rPr>
-              <a:t>台へ拡張</a:t>
+              <a:rPr lang="ja-JP" altLang="en-US" b="1" dirty="0">
+                <a:latin typeface="Arial"/>
+                <a:ea typeface="Arial"/>
+              </a:rPr>
+              <a:t>台へ実験系を拡張</a:t>
             </a:r>
           </a:p>
         </p:txBody>
@@ -12637,30 +13473,6 @@
           </a:p>
         </p:txBody>
       </p:sp>
-      <p:pic>
-        <p:nvPicPr>
-          <p:cNvPr id="5" name="Picture 4" descr="image.png"/>
-          <p:cNvPicPr>
-            <a:picLocks noChangeAspect="1"/>
-          </p:cNvPicPr>
-          <p:nvPr/>
-        </p:nvPicPr>
-        <p:blipFill>
-          <a:blip r:embed="rId2"/>
-          <a:stretch>
-            <a:fillRect/>
-          </a:stretch>
-        </p:blipFill>
-        <p:spPr>
-          <a:xfrm>
-            <a:off x="1265665" y="1986279"/>
-            <a:ext cx="7486593" cy="4121040"/>
-          </a:xfrm>
-          <a:prstGeom prst="rect">
-            <a:avLst/>
-          </a:prstGeom>
-        </p:spPr>
-      </p:pic>
       <p:sp>
         <p:nvSpPr>
           <p:cNvPr id="10" name="テキスト プレースホルダー 9">
@@ -12679,7 +13491,7 @@
         </p:nvSpPr>
         <p:spPr>
           <a:xfrm>
-            <a:off x="213525" y="906114"/>
+            <a:off x="213525" y="916624"/>
             <a:ext cx="9590875" cy="969263"/>
           </a:xfrm>
         </p:spPr>
@@ -12744,6 +13556,36 @@
           </a:p>
         </p:txBody>
       </p:sp>
+      <p:pic>
+        <p:nvPicPr>
+          <p:cNvPr id="7" name="図 6">
+            <a:extLst>
+              <a:ext uri="{FF2B5EF4-FFF2-40B4-BE49-F238E27FC236}">
+                <a16:creationId xmlns:a16="http://schemas.microsoft.com/office/drawing/2014/main" id="{8FFDDF13-66A9-06ED-5A89-990A592AE9DC}"/>
+              </a:ext>
+            </a:extLst>
+          </p:cNvPr>
+          <p:cNvPicPr>
+            <a:picLocks noChangeAspect="1"/>
+          </p:cNvPicPr>
+          <p:nvPr/>
+        </p:nvPicPr>
+        <p:blipFill>
+          <a:blip r:embed="rId2"/>
+          <a:stretch>
+            <a:fillRect/>
+          </a:stretch>
+        </p:blipFill>
+        <p:spPr>
+          <a:xfrm>
+            <a:off x="274320" y="2099230"/>
+            <a:ext cx="9411446" cy="4224179"/>
+          </a:xfrm>
+          <a:prstGeom prst="rect">
+            <a:avLst/>
+          </a:prstGeom>
+        </p:spPr>
+      </p:pic>
     </p:spTree>
   </p:cSld>
   <p:clrMapOvr>
@@ -12769,6 +13611,36 @@
           <a:chExt cx="0" cy="0"/>
         </a:xfrm>
       </p:grpSpPr>
+      <p:pic>
+        <p:nvPicPr>
+          <p:cNvPr id="4" name="図 3">
+            <a:extLst>
+              <a:ext uri="{FF2B5EF4-FFF2-40B4-BE49-F238E27FC236}">
+                <a16:creationId xmlns:a16="http://schemas.microsoft.com/office/drawing/2014/main" id="{F964A95F-0558-2B17-80EA-6E3CFFE7F068}"/>
+              </a:ext>
+            </a:extLst>
+          </p:cNvPr>
+          <p:cNvPicPr>
+            <a:picLocks noChangeAspect="1"/>
+          </p:cNvPicPr>
+          <p:nvPr/>
+        </p:nvPicPr>
+        <p:blipFill>
+          <a:blip r:embed="rId2"/>
+          <a:stretch>
+            <a:fillRect/>
+          </a:stretch>
+        </p:blipFill>
+        <p:spPr>
+          <a:xfrm>
+            <a:off x="274320" y="2223662"/>
+            <a:ext cx="9411446" cy="4224179"/>
+          </a:xfrm>
+          <a:prstGeom prst="rect">
+            <a:avLst/>
+          </a:prstGeom>
+        </p:spPr>
+      </p:pic>
       <p:sp>
         <p:nvSpPr>
           <p:cNvPr id="2" name="Title 1"/>
@@ -12917,36 +13789,6 @@
           </a:p>
         </p:txBody>
       </p:sp>
-      <p:pic>
-        <p:nvPicPr>
-          <p:cNvPr id="5" name="Picture 4" descr="image.png">
-            <a:extLst>
-              <a:ext uri="{FF2B5EF4-FFF2-40B4-BE49-F238E27FC236}">
-                <a16:creationId xmlns:a16="http://schemas.microsoft.com/office/drawing/2014/main" id="{9701A711-972D-9916-5160-05066857DAEB}"/>
-              </a:ext>
-            </a:extLst>
-          </p:cNvPr>
-          <p:cNvPicPr>
-            <a:picLocks noChangeAspect="1"/>
-          </p:cNvPicPr>
-          <p:nvPr/>
-        </p:nvPicPr>
-        <p:blipFill>
-          <a:blip r:embed="rId3"/>
-          <a:stretch>
-            <a:fillRect/>
-          </a:stretch>
-        </p:blipFill>
-        <p:spPr>
-          <a:xfrm>
-            <a:off x="1733010" y="2552756"/>
-            <a:ext cx="6630628" cy="3649869"/>
-          </a:xfrm>
-          <a:prstGeom prst="rect">
-            <a:avLst/>
-          </a:prstGeom>
-        </p:spPr>
-      </p:pic>
       <p:sp>
         <p:nvSpPr>
           <p:cNvPr id="6" name="正方形/長方形 5">
@@ -12961,8 +13803,8 @@
         </p:nvSpPr>
         <p:spPr>
           <a:xfrm>
-            <a:off x="2045970" y="2468880"/>
-            <a:ext cx="662940" cy="3733745"/>
+            <a:off x="1243330" y="2468878"/>
+            <a:ext cx="727710" cy="3733745"/>
           </a:xfrm>
           <a:prstGeom prst="rect">
             <a:avLst/>
@@ -13181,14 +14023,14 @@
           <p:nvPr/>
         </p:nvPicPr>
         <p:blipFill>
-          <a:blip r:embed="rId2"/>
+          <a:blip r:embed="rId3"/>
           <a:stretch>
             <a:fillRect/>
           </a:stretch>
         </p:blipFill>
         <p:spPr>
           <a:xfrm>
-            <a:off x="162997" y="2929814"/>
+            <a:off x="162997" y="2597146"/>
             <a:ext cx="2718281" cy="2389161"/>
           </a:xfrm>
           <a:prstGeom prst="rect">
@@ -13220,6 +14062,50 @@
           </a:prstGeom>
         </p:spPr>
       </p:pic>
+      <p:sp>
+        <p:nvSpPr>
+          <p:cNvPr id="7" name="テキスト ボックス 6">
+            <a:extLst>
+              <a:ext uri="{FF2B5EF4-FFF2-40B4-BE49-F238E27FC236}">
+                <a16:creationId xmlns:a16="http://schemas.microsoft.com/office/drawing/2014/main" id="{66E17E4E-052E-6D0C-6653-26AA49504005}"/>
+              </a:ext>
+            </a:extLst>
+          </p:cNvPr>
+          <p:cNvSpPr txBox="1"/>
+          <p:nvPr/>
+        </p:nvSpPr>
+        <p:spPr>
+          <a:xfrm>
+            <a:off x="162997" y="5487676"/>
+            <a:ext cx="3166450" cy="646331"/>
+          </a:xfrm>
+          <a:prstGeom prst="rect">
+            <a:avLst/>
+          </a:prstGeom>
+          <a:noFill/>
+        </p:spPr>
+        <p:txBody>
+          <a:bodyPr wrap="square">
+            <a:spAutoFit/>
+          </a:bodyPr>
+          <a:lstStyle/>
+          <a:p>
+            <a:r>
+              <a:rPr lang="en-US" altLang="ja-JP" sz="900" dirty="0"/>
+              <a:t>H.-C. Chang, X. Cao, U. K. Mishra, and R. A. York, "Phase Noise in Coupled Oscillators: Theory and Experiment," IEEE Trans. </a:t>
+            </a:r>
+            <a:r>
+              <a:rPr lang="en-US" altLang="ja-JP" sz="900" dirty="0" err="1"/>
+              <a:t>Microw</a:t>
+            </a:r>
+            <a:r>
+              <a:rPr lang="en-US" altLang="ja-JP" sz="900" dirty="0"/>
+              <a:t>. Theory Techn., vol. 45, no. 5, pp. 604–615, May 1997.</a:t>
+            </a:r>
+            <a:endParaRPr lang="ja-JP" altLang="en-US" sz="900" dirty="0"/>
+          </a:p>
+        </p:txBody>
+      </p:sp>
     </p:spTree>
   </p:cSld>
   <p:clrMapOvr>
@@ -13389,6 +14275,47 @@
                 <a:ea typeface="Arial"/>
               </a:rPr>
               <a:t>OCXO2台に対し、位相差FRFRをターゲットとしてオシロスコープで計測。計測結果を基に片方のOCXOへフィードバック電圧を印加する。</a:t>
+            </a:r>
+            <a:endParaRPr lang="en-US" b="1" dirty="0">
+              <a:solidFill>
+                <a:srgbClr val="1B2A5A"/>
+              </a:solidFill>
+              <a:latin typeface="Arial"/>
+              <a:ea typeface="Arial"/>
+            </a:endParaRPr>
+          </a:p>
+          <a:p>
+            <a:r>
+              <a:rPr lang="en-US" b="1" dirty="0">
+                <a:solidFill>
+                  <a:srgbClr val="1B2A5A"/>
+                </a:solidFill>
+              </a:rPr>
+              <a:t>10</a:t>
+            </a:r>
+            <a:r>
+              <a:rPr lang="ja-JP" altLang="en-US" b="1" dirty="0">
+                <a:solidFill>
+                  <a:srgbClr val="1B2A5A"/>
+                </a:solidFill>
+              </a:rPr>
+              <a:t>分間の制御を行い、うち安定した制御中の</a:t>
+            </a:r>
+            <a:r>
+              <a:rPr lang="en-US" altLang="ja-JP" b="1" dirty="0">
+                <a:solidFill>
+                  <a:srgbClr val="1B2A5A"/>
+                </a:solidFill>
+              </a:rPr>
+              <a:t>10s</a:t>
+            </a:r>
+            <a:r>
+              <a:rPr lang="ja-JP" altLang="en-US" b="1" dirty="0">
+                <a:solidFill>
+                  <a:srgbClr val="1B2A5A"/>
+                </a:solidFill>
+              </a:rPr>
+              <a:t>を切り取ってジッタ測定を行う。</a:t>
             </a:r>
             <a:endParaRPr dirty="0">
               <a:latin typeface="Arial"/>
@@ -15762,73 +16689,49 @@
           <a:p>
             <a:pPr lvl="1"/>
             <a:r>
-              <a:rPr lang="ja-JP" altLang="en-US" dirty="0">
+              <a:rPr lang="ja-JP" altLang="en-US" b="1" dirty="0">
                 <a:latin typeface="Arial"/>
                 <a:ea typeface="Arial"/>
               </a:rPr>
               <a:t>力学系における車両追従制御（</a:t>
             </a:r>
             <a:r>
-              <a:rPr lang="en-US" altLang="ja-JP" dirty="0">
+              <a:rPr lang="en-US" altLang="ja-JP" b="1" dirty="0">
                 <a:latin typeface="Arial"/>
                 <a:ea typeface="Arial"/>
               </a:rPr>
               <a:t>ACC</a:t>
             </a:r>
             <a:r>
-              <a:rPr lang="ja-JP" altLang="en-US" dirty="0">
+              <a:rPr lang="ja-JP" altLang="en-US" b="1" dirty="0">
                 <a:latin typeface="Arial"/>
                 <a:ea typeface="Arial"/>
               </a:rPr>
               <a:t>）を本実験における波動系に応用</a:t>
             </a:r>
-            <a:endParaRPr dirty="0">
+            <a:endParaRPr b="1" dirty="0">
               <a:latin typeface="Arial"/>
               <a:ea typeface="Arial"/>
             </a:endParaRPr>
           </a:p>
         </p:txBody>
       </p:sp>
-      <p:pic>
-        <p:nvPicPr>
-          <p:cNvPr id="6" name="図 5" descr="The image illustrates a diagram showing various components of an automated control system, including vehicle distance, speed, oscillation, and control elements like OCXO-1 and OCXO-2, with a focus on phase difference and control voltage.&#10;&#10;AI 生成コンテンツは誤りを含む可能性があります。">
-            <a:extLst>
-              <a:ext uri="{FF2B5EF4-FFF2-40B4-BE49-F238E27FC236}">
-                <a16:creationId xmlns:a16="http://schemas.microsoft.com/office/drawing/2014/main" id="{1BA0518F-A2AD-4737-69B5-0D21DD844B3A}"/>
-              </a:ext>
-            </a:extLst>
-          </p:cNvPr>
-          <p:cNvPicPr>
-            <a:picLocks noChangeAspect="1"/>
-          </p:cNvPicPr>
-          <p:nvPr/>
-        </p:nvPicPr>
-        <p:blipFill>
-          <a:blip r:embed="rId5"/>
-          <a:stretch>
-            <a:fillRect/>
-          </a:stretch>
-        </p:blipFill>
-        <p:spPr>
-          <a:xfrm>
-            <a:off x="5074920" y="2468880"/>
-            <a:ext cx="4572000" cy="2192421"/>
-          </a:xfrm>
-          <a:prstGeom prst="rect">
-            <a:avLst/>
-          </a:prstGeom>
-        </p:spPr>
-      </p:pic>
       <p:graphicFrame>
         <p:nvGraphicFramePr>
           <p:cNvPr id="7" name="Table 6"/>
           <p:cNvGraphicFramePr>
             <a:graphicFrameLocks noGrp="1"/>
           </p:cNvGraphicFramePr>
-          <p:nvPr/>
+          <p:nvPr>
+            <p:extLst>
+              <p:ext uri="{D42A27DB-BD31-4B8C-83A1-F6EECF244321}">
+                <p14:modId xmlns:p14="http://schemas.microsoft.com/office/powerpoint/2010/main" val="3962437257"/>
+              </p:ext>
+            </p:extLst>
+          </p:nvPr>
         </p:nvGraphicFramePr>
         <p:xfrm>
-          <a:off x="274320" y="2468880"/>
+          <a:off x="4937760" y="2816352"/>
           <a:ext cx="4526279" cy="3108960"/>
         </p:xfrm>
         <a:graphic>
@@ -15838,8 +16741,20 @@
                 <a:tableStyleId>{5C22544A-7EE6-4342-B048-85BDC9FD1C3A}</a:tableStyleId>
               </a:tblPr>
               <a:tblGrid>
-                <a:gridCol w="1901037"/>
-                <a:gridCol w="2625242"/>
+                <a:gridCol w="1901037">
+                  <a:extLst>
+                    <a:ext uri="{9D8B030D-6E8A-4147-A177-3AD203B41FA5}">
+                      <a16:colId xmlns:a16="http://schemas.microsoft.com/office/drawing/2014/main" val="20000"/>
+                    </a:ext>
+                  </a:extLst>
+                </a:gridCol>
+                <a:gridCol w="2625242">
+                  <a:extLst>
+                    <a:ext uri="{9D8B030D-6E8A-4147-A177-3AD203B41FA5}">
+                      <a16:colId xmlns:a16="http://schemas.microsoft.com/office/drawing/2014/main" val="20001"/>
+                    </a:ext>
+                  </a:extLst>
+                </a:gridCol>
               </a:tblGrid>
               <a:tr h="518160">
                 <a:tc>
@@ -15848,14 +16763,24 @@
                     <a:lstStyle/>
                     <a:p>
                       <a:r>
-                        <a:rPr sz="900" b="1">
+                        <a:rPr sz="1200" b="1" dirty="0" err="1">
                           <a:solidFill>
                             <a:srgbClr val="FFFFFF"/>
                           </a:solidFill>
                           <a:latin typeface="Arial"/>
                           <a:ea typeface="Arial"/>
                         </a:rPr>
-                        <a:t>力学系（車両追従ACC）</a:t>
+                        <a:t>力学系（車両追従ACC</a:t>
+                      </a:r>
+                      <a:r>
+                        <a:rPr sz="1200" b="1" dirty="0">
+                          <a:solidFill>
+                            <a:srgbClr val="FFFFFF"/>
+                          </a:solidFill>
+                          <a:latin typeface="Arial"/>
+                          <a:ea typeface="Arial"/>
+                        </a:rPr>
+                        <a:t>）</a:t>
                       </a:r>
                     </a:p>
                   </a:txBody>
@@ -15871,14 +16796,24 @@
                     <a:lstStyle/>
                     <a:p>
                       <a:r>
-                        <a:rPr sz="900" b="1">
+                        <a:rPr sz="1200" b="1" dirty="0" err="1">
                           <a:solidFill>
                             <a:srgbClr val="FFFFFF"/>
                           </a:solidFill>
                           <a:latin typeface="Arial"/>
                           <a:ea typeface="Arial"/>
                         </a:rPr>
-                        <a:t>波動系（本研究）</a:t>
+                        <a:t>波動系（本研究</a:t>
+                      </a:r>
+                      <a:r>
+                        <a:rPr sz="1200" b="1" dirty="0">
+                          <a:solidFill>
+                            <a:srgbClr val="FFFFFF"/>
+                          </a:solidFill>
+                          <a:latin typeface="Arial"/>
+                          <a:ea typeface="Arial"/>
+                        </a:rPr>
+                        <a:t>）</a:t>
                       </a:r>
                     </a:p>
                   </a:txBody>
@@ -15888,6 +16823,11 @@
                     </a:solidFill>
                   </a:tcPr>
                 </a:tc>
+                <a:extLst>
+                  <a:ext uri="{0D108BD9-81ED-4DB2-BD59-A6C34878D82A}">
+                    <a16:rowId xmlns:a16="http://schemas.microsoft.com/office/drawing/2014/main" val="10000"/>
+                  </a:ext>
+                </a:extLst>
               </a:tr>
               <a:tr h="518160">
                 <a:tc>
@@ -15896,7 +16836,7 @@
                     <a:lstStyle/>
                     <a:p>
                       <a:r>
-                        <a:rPr sz="900">
+                        <a:rPr sz="1200">
                           <a:solidFill>
                             <a:srgbClr val="202020"/>
                           </a:solidFill>
@@ -15919,14 +16859,43 @@
                     <a:lstStyle/>
                     <a:p>
                       <a:r>
-                        <a:rPr sz="900">
+                        <a:rPr sz="1200" dirty="0" err="1">
                           <a:solidFill>
                             <a:srgbClr val="202020"/>
                           </a:solidFill>
                           <a:latin typeface="Arial"/>
                           <a:ea typeface="Arial"/>
                         </a:rPr>
-                        <a:t>位相 φ（FRFR：2台のゼロクロス時間差 [ns]）</a:t>
+                        <a:t>位相</a:t>
+                      </a:r>
+                      <a:r>
+                        <a:rPr sz="1200" dirty="0">
+                          <a:solidFill>
+                            <a:srgbClr val="202020"/>
+                          </a:solidFill>
+                          <a:latin typeface="Arial"/>
+                          <a:ea typeface="Arial"/>
+                        </a:rPr>
+                        <a:t> φ</a:t>
+                      </a:r>
+                      <a:endParaRPr lang="en-US" sz="1200" dirty="0">
+                        <a:solidFill>
+                          <a:srgbClr val="202020"/>
+                        </a:solidFill>
+                        <a:latin typeface="Arial"/>
+                        <a:ea typeface="Arial"/>
+                      </a:endParaRPr>
+                    </a:p>
+                    <a:p>
+                      <a:r>
+                        <a:rPr sz="1200" dirty="0">
+                          <a:solidFill>
+                            <a:srgbClr val="202020"/>
+                          </a:solidFill>
+                          <a:latin typeface="Arial"/>
+                          <a:ea typeface="Arial"/>
+                        </a:rPr>
+                        <a:t>FRFR：2台のゼロクロス時間差 [ns]</a:t>
                       </a:r>
                     </a:p>
                   </a:txBody>
@@ -15936,6 +16905,11 @@
                     </a:solidFill>
                   </a:tcPr>
                 </a:tc>
+                <a:extLst>
+                  <a:ext uri="{0D108BD9-81ED-4DB2-BD59-A6C34878D82A}">
+                    <a16:rowId xmlns:a16="http://schemas.microsoft.com/office/drawing/2014/main" val="10001"/>
+                  </a:ext>
+                </a:extLst>
               </a:tr>
               <a:tr h="518160">
                 <a:tc>
@@ -15944,14 +16918,24 @@
                     <a:lstStyle/>
                     <a:p>
                       <a:r>
-                        <a:rPr sz="900">
+                        <a:rPr sz="1200" dirty="0" err="1">
                           <a:solidFill>
                             <a:srgbClr val="202020"/>
                           </a:solidFill>
                           <a:latin typeface="Arial"/>
                           <a:ea typeface="Arial"/>
                         </a:rPr>
-                        <a:t>速度（相対速度）</a:t>
+                        <a:t>速度（相対速度</a:t>
+                      </a:r>
+                      <a:r>
+                        <a:rPr sz="1200" dirty="0">
+                          <a:solidFill>
+                            <a:srgbClr val="202020"/>
+                          </a:solidFill>
+                          <a:latin typeface="Arial"/>
+                          <a:ea typeface="Arial"/>
+                        </a:rPr>
+                        <a:t>）</a:t>
                       </a:r>
                     </a:p>
                   </a:txBody>
@@ -15967,7 +16951,7 @@
                     <a:lstStyle/>
                     <a:p>
                       <a:r>
-                        <a:rPr sz="900">
+                        <a:rPr sz="1200">
                           <a:solidFill>
                             <a:srgbClr val="202020"/>
                           </a:solidFill>
@@ -15984,6 +16968,11 @@
                     </a:solidFill>
                   </a:tcPr>
                 </a:tc>
+                <a:extLst>
+                  <a:ext uri="{0D108BD9-81ED-4DB2-BD59-A6C34878D82A}">
+                    <a16:rowId xmlns:a16="http://schemas.microsoft.com/office/drawing/2014/main" val="10002"/>
+                  </a:ext>
+                </a:extLst>
               </a:tr>
               <a:tr h="518160">
                 <a:tc>
@@ -15992,7 +16981,7 @@
                     <a:lstStyle/>
                     <a:p>
                       <a:r>
-                        <a:rPr sz="900">
+                        <a:rPr sz="1200">
                           <a:solidFill>
                             <a:srgbClr val="202020"/>
                           </a:solidFill>
@@ -16015,14 +17004,43 @@
                     <a:lstStyle/>
                     <a:p>
                       <a:r>
-                        <a:rPr sz="900">
+                        <a:rPr sz="1200" dirty="0" err="1">
                           <a:solidFill>
                             <a:srgbClr val="202020"/>
                           </a:solidFill>
                           <a:latin typeface="Arial"/>
                           <a:ea typeface="Arial"/>
                         </a:rPr>
-                        <a:t>制御電圧 u [V]（OCXO-2へ印加, 0–5V）</a:t>
+                        <a:t>制御電圧</a:t>
+                      </a:r>
+                      <a:r>
+                        <a:rPr sz="1200" dirty="0">
+                          <a:solidFill>
+                            <a:srgbClr val="202020"/>
+                          </a:solidFill>
+                          <a:latin typeface="Arial"/>
+                          <a:ea typeface="Arial"/>
+                        </a:rPr>
+                        <a:t> u [V]</a:t>
+                      </a:r>
+                      <a:endParaRPr lang="en-US" sz="1200" dirty="0">
+                        <a:solidFill>
+                          <a:srgbClr val="202020"/>
+                        </a:solidFill>
+                        <a:latin typeface="Arial"/>
+                        <a:ea typeface="Arial"/>
+                      </a:endParaRPr>
+                    </a:p>
+                    <a:p>
+                      <a:r>
+                        <a:rPr sz="1200" dirty="0">
+                          <a:solidFill>
+                            <a:srgbClr val="202020"/>
+                          </a:solidFill>
+                          <a:latin typeface="Arial"/>
+                          <a:ea typeface="Arial"/>
+                        </a:rPr>
+                        <a:t>（OCXO-2へ印加, 0–5V）</a:t>
                       </a:r>
                     </a:p>
                   </a:txBody>
@@ -16032,6 +17050,11 @@
                     </a:solidFill>
                   </a:tcPr>
                 </a:tc>
+                <a:extLst>
+                  <a:ext uri="{0D108BD9-81ED-4DB2-BD59-A6C34878D82A}">
+                    <a16:rowId xmlns:a16="http://schemas.microsoft.com/office/drawing/2014/main" val="10003"/>
+                  </a:ext>
+                </a:extLst>
               </a:tr>
               <a:tr h="518160">
                 <a:tc>
@@ -16040,7 +17063,7 @@
                     <a:lstStyle/>
                     <a:p>
                       <a:r>
-                        <a:rPr sz="900">
+                        <a:rPr sz="1200">
                           <a:solidFill>
                             <a:srgbClr val="202020"/>
                           </a:solidFill>
@@ -16063,14 +17086,83 @@
                     <a:lstStyle/>
                     <a:p>
                       <a:r>
-                        <a:rPr sz="900">
+                        <a:rPr sz="1200" dirty="0" err="1">
                           <a:solidFill>
                             <a:srgbClr val="202020"/>
                           </a:solidFill>
                           <a:latin typeface="Arial"/>
                           <a:ea typeface="Arial"/>
                         </a:rPr>
-                        <a:t>目標 FRFR（位相同期の目標値 φ_ref）</a:t>
+                        <a:t>目標</a:t>
+                      </a:r>
+                      <a:r>
+                        <a:rPr sz="1200" dirty="0">
+                          <a:solidFill>
+                            <a:srgbClr val="202020"/>
+                          </a:solidFill>
+                          <a:latin typeface="Arial"/>
+                          <a:ea typeface="Arial"/>
+                        </a:rPr>
+                        <a:t> FRFR</a:t>
+                      </a:r>
+                      <a:endParaRPr lang="en-US" sz="1200" dirty="0">
+                        <a:solidFill>
+                          <a:srgbClr val="202020"/>
+                        </a:solidFill>
+                        <a:latin typeface="Arial"/>
+                        <a:ea typeface="Arial"/>
+                      </a:endParaRPr>
+                    </a:p>
+                    <a:p>
+                      <a:r>
+                        <a:rPr sz="1200" dirty="0">
+                          <a:solidFill>
+                            <a:srgbClr val="202020"/>
+                          </a:solidFill>
+                          <a:latin typeface="Arial"/>
+                          <a:ea typeface="Arial"/>
+                        </a:rPr>
+                        <a:t>（</a:t>
+                      </a:r>
+                      <a:r>
+                        <a:rPr sz="1200" dirty="0" err="1">
+                          <a:solidFill>
+                            <a:srgbClr val="202020"/>
+                          </a:solidFill>
+                          <a:latin typeface="Arial"/>
+                          <a:ea typeface="Arial"/>
+                        </a:rPr>
+                        <a:t>位相同期の目標値</a:t>
+                      </a:r>
+                      <a:r>
+                        <a:rPr sz="1200" dirty="0">
+                          <a:solidFill>
+                            <a:srgbClr val="202020"/>
+                          </a:solidFill>
+                          <a:latin typeface="Arial"/>
+                          <a:ea typeface="Arial"/>
+                        </a:rPr>
+                        <a:t> </a:t>
+                      </a:r>
+                      <a:r>
+                        <a:rPr sz="1200" dirty="0" err="1">
+                          <a:solidFill>
+                            <a:srgbClr val="202020"/>
+                          </a:solidFill>
+                          <a:latin typeface="Arial"/>
+                          <a:ea typeface="Arial"/>
+                        </a:rPr>
+                        <a:t>φ_ref</a:t>
+                      </a:r>
+                      <a:r>
+                        <a:rPr sz="1200" dirty="0">
+                          <a:solidFill>
+                            <a:srgbClr val="202020"/>
+                          </a:solidFill>
+                          <a:latin typeface="Arial"/>
+                          <a:ea typeface="Arial"/>
+                        </a:rPr>
+                        <a:t>）</a:t>
                       </a:r>
                     </a:p>
                   </a:txBody>
@@ -16080,6 +17172,11 @@
                     </a:solidFill>
                   </a:tcPr>
                 </a:tc>
+                <a:extLst>
+                  <a:ext uri="{0D108BD9-81ED-4DB2-BD59-A6C34878D82A}">
+                    <a16:rowId xmlns:a16="http://schemas.microsoft.com/office/drawing/2014/main" val="10004"/>
+                  </a:ext>
+                </a:extLst>
               </a:tr>
               <a:tr h="518160">
                 <a:tc>
@@ -16088,14 +17185,24 @@
                     <a:lstStyle/>
                     <a:p>
                       <a:r>
-                        <a:rPr sz="900">
+                        <a:rPr sz="1200" dirty="0" err="1">
                           <a:solidFill>
                             <a:srgbClr val="202020"/>
                           </a:solidFill>
                           <a:latin typeface="Arial"/>
                           <a:ea typeface="Arial"/>
                         </a:rPr>
-                        <a:t>運動則（加速度→速度→位置）</a:t>
+                        <a:t>運動則（加速度→速度→位置</a:t>
+                      </a:r>
+                      <a:r>
+                        <a:rPr sz="1200" dirty="0">
+                          <a:solidFill>
+                            <a:srgbClr val="202020"/>
+                          </a:solidFill>
+                          <a:latin typeface="Arial"/>
+                          <a:ea typeface="Arial"/>
+                        </a:rPr>
+                        <a:t>）</a:t>
                       </a:r>
                     </a:p>
                   </a:txBody>
@@ -16111,15 +17218,42 @@
                     <a:lstStyle/>
                     <a:p>
                       <a:r>
-                        <a:rPr sz="900">
+                        <a:rPr sz="1200" dirty="0" err="1">
                           <a:solidFill>
                             <a:srgbClr val="202020"/>
                           </a:solidFill>
                           <a:latin typeface="Arial"/>
                           <a:ea typeface="Arial"/>
                         </a:rPr>
-                        <a:t>プラント u→Δf=K(u−u0)→積分でφ（K≈860）</a:t>
+                        <a:t>u→Δf</a:t>
                       </a:r>
+                      <a:r>
+                        <a:rPr sz="1200" dirty="0">
+                          <a:solidFill>
+                            <a:srgbClr val="202020"/>
+                          </a:solidFill>
+                          <a:latin typeface="Arial"/>
+                          <a:ea typeface="Arial"/>
+                        </a:rPr>
+                        <a:t>=K(u−u0)→</a:t>
+                      </a:r>
+                      <a:r>
+                        <a:rPr sz="1200" dirty="0" err="1">
+                          <a:solidFill>
+                            <a:srgbClr val="202020"/>
+                          </a:solidFill>
+                          <a:latin typeface="Arial"/>
+                          <a:ea typeface="Arial"/>
+                        </a:rPr>
+                        <a:t>積分でφ</a:t>
+                      </a:r>
+                      <a:endParaRPr sz="1200" dirty="0">
+                        <a:solidFill>
+                          <a:srgbClr val="202020"/>
+                        </a:solidFill>
+                        <a:latin typeface="Arial"/>
+                        <a:ea typeface="Arial"/>
+                      </a:endParaRPr>
                     </a:p>
                   </a:txBody>
                   <a:tcPr marL="50800" marR="50800" marT="25400" marB="25400" anchor="ctr">
@@ -16128,11 +17262,46 @@
                     </a:solidFill>
                   </a:tcPr>
                 </a:tc>
+                <a:extLst>
+                  <a:ext uri="{0D108BD9-81ED-4DB2-BD59-A6C34878D82A}">
+                    <a16:rowId xmlns:a16="http://schemas.microsoft.com/office/drawing/2014/main" val="10005"/>
+                  </a:ext>
+                </a:extLst>
               </a:tr>
             </a:tbl>
           </a:graphicData>
         </a:graphic>
       </p:graphicFrame>
+      <p:pic>
+        <p:nvPicPr>
+          <p:cNvPr id="5" name="図 4" descr="The diagram illustrates an automotive control system, showing relationships between various components such as target distance, leading and following vehicles, speed variation, and control systems including OCXO-1 and OCXO-2, with an emphasis on oscillation and voltage control.&#10;&#10;AI 生成コンテンツは誤りを含む可能性があります。">
+            <a:extLst>
+              <a:ext uri="{FF2B5EF4-FFF2-40B4-BE49-F238E27FC236}">
+                <a16:creationId xmlns:a16="http://schemas.microsoft.com/office/drawing/2014/main" id="{09284694-AAE1-A89C-1F88-408284E84D20}"/>
+              </a:ext>
+            </a:extLst>
+          </p:cNvPr>
+          <p:cNvPicPr>
+            <a:picLocks noChangeAspect="1"/>
+          </p:cNvPicPr>
+          <p:nvPr/>
+        </p:nvPicPr>
+        <p:blipFill>
+          <a:blip r:embed="rId2"/>
+          <a:stretch>
+            <a:fillRect/>
+          </a:stretch>
+        </p:blipFill>
+        <p:spPr>
+          <a:xfrm>
+            <a:off x="441961" y="3399507"/>
+            <a:ext cx="4325220" cy="1870056"/>
+          </a:xfrm>
+          <a:prstGeom prst="rect">
+            <a:avLst/>
+          </a:prstGeom>
+        </p:spPr>
+      </p:pic>
     </p:spTree>
   </p:cSld>
   <p:clrMapOvr>
